--- a/probability_and_statistics/5_inference/Stats-A-B-testing/Stats-A-B-testing.pptx
+++ b/probability_and_statistics/5_inference/Stats-A-B-testing/Stats-A-B-testing.pptx
@@ -228,7 +228,7 @@
           <a:p>
             <a:fld id="{7BAEECA8-D063-486F-AE31-5020270C1449}" type="datetimeFigureOut">
               <a:rPr lang="en-US" smtClean="0"/>
-              <a:t>2/20/2026</a:t>
+              <a:t>4/15/2026</a:t>
             </a:fld>
             <a:endParaRPr lang="en-US"/>
           </a:p>
@@ -470,7 +470,7 @@
           <a:p>
             <a:fld id="{6383FAE1-13DE-4511-8C1B-C8AFB720664C}" type="datetimeFigureOut">
               <a:rPr lang="en-US" smtClean="0"/>
-              <a:t>2/20/2026</a:t>
+              <a:t>4/15/2026</a:t>
             </a:fld>
             <a:endParaRPr lang="en-US"/>
           </a:p>
@@ -668,7 +668,7 @@
           <a:p>
             <a:fld id="{6383FAE1-13DE-4511-8C1B-C8AFB720664C}" type="datetimeFigureOut">
               <a:rPr lang="en-US" smtClean="0"/>
-              <a:t>2/20/2026</a:t>
+              <a:t>4/15/2026</a:t>
             </a:fld>
             <a:endParaRPr lang="en-US"/>
           </a:p>
@@ -876,7 +876,7 @@
           <a:p>
             <a:fld id="{6383FAE1-13DE-4511-8C1B-C8AFB720664C}" type="datetimeFigureOut">
               <a:rPr lang="en-US" smtClean="0"/>
-              <a:t>2/20/2026</a:t>
+              <a:t>4/15/2026</a:t>
             </a:fld>
             <a:endParaRPr lang="en-US"/>
           </a:p>
@@ -1074,7 +1074,7 @@
           <a:p>
             <a:fld id="{6383FAE1-13DE-4511-8C1B-C8AFB720664C}" type="datetimeFigureOut">
               <a:rPr lang="en-US" smtClean="0"/>
-              <a:t>2/20/2026</a:t>
+              <a:t>4/15/2026</a:t>
             </a:fld>
             <a:endParaRPr lang="en-US"/>
           </a:p>
@@ -1349,7 +1349,7 @@
           <a:p>
             <a:fld id="{6383FAE1-13DE-4511-8C1B-C8AFB720664C}" type="datetimeFigureOut">
               <a:rPr lang="en-US" smtClean="0"/>
-              <a:t>2/20/2026</a:t>
+              <a:t>4/15/2026</a:t>
             </a:fld>
             <a:endParaRPr lang="en-US"/>
           </a:p>
@@ -1614,7 +1614,7 @@
           <a:p>
             <a:fld id="{6383FAE1-13DE-4511-8C1B-C8AFB720664C}" type="datetimeFigureOut">
               <a:rPr lang="en-US" smtClean="0"/>
-              <a:t>2/20/2026</a:t>
+              <a:t>4/15/2026</a:t>
             </a:fld>
             <a:endParaRPr lang="en-US"/>
           </a:p>
@@ -2026,7 +2026,7 @@
           <a:p>
             <a:fld id="{6383FAE1-13DE-4511-8C1B-C8AFB720664C}" type="datetimeFigureOut">
               <a:rPr lang="en-US" smtClean="0"/>
-              <a:t>2/20/2026</a:t>
+              <a:t>4/15/2026</a:t>
             </a:fld>
             <a:endParaRPr lang="en-US"/>
           </a:p>
@@ -2167,7 +2167,7 @@
           <a:p>
             <a:fld id="{6383FAE1-13DE-4511-8C1B-C8AFB720664C}" type="datetimeFigureOut">
               <a:rPr lang="en-US" smtClean="0"/>
-              <a:t>2/20/2026</a:t>
+              <a:t>4/15/2026</a:t>
             </a:fld>
             <a:endParaRPr lang="en-US"/>
           </a:p>
@@ -2280,7 +2280,7 @@
           <a:p>
             <a:fld id="{6383FAE1-13DE-4511-8C1B-C8AFB720664C}" type="datetimeFigureOut">
               <a:rPr lang="en-US" smtClean="0"/>
-              <a:t>2/20/2026</a:t>
+              <a:t>4/15/2026</a:t>
             </a:fld>
             <a:endParaRPr lang="en-US"/>
           </a:p>
@@ -2591,7 +2591,7 @@
           <a:p>
             <a:fld id="{6383FAE1-13DE-4511-8C1B-C8AFB720664C}" type="datetimeFigureOut">
               <a:rPr lang="en-US" smtClean="0"/>
-              <a:t>2/20/2026</a:t>
+              <a:t>4/15/2026</a:t>
             </a:fld>
             <a:endParaRPr lang="en-US"/>
           </a:p>
@@ -2882,7 +2882,7 @@
           <a:p>
             <a:fld id="{6383FAE1-13DE-4511-8C1B-C8AFB720664C}" type="datetimeFigureOut">
               <a:rPr lang="en-US" smtClean="0"/>
-              <a:t>2/20/2026</a:t>
+              <a:t>4/15/2026</a:t>
             </a:fld>
             <a:endParaRPr lang="en-US"/>
           </a:p>
@@ -3126,7 +3126,7 @@
           <a:p>
             <a:fld id="{6383FAE1-13DE-4511-8C1B-C8AFB720664C}" type="datetimeFigureOut">
               <a:rPr lang="en-US" smtClean="0"/>
-              <a:t>2/20/2026</a:t>
+              <a:t>4/15/2026</a:t>
             </a:fld>
             <a:endParaRPr lang="en-US"/>
           </a:p>
@@ -3703,20 +3703,22 @@
         </p:nvSpPr>
         <p:spPr>
           <a:xfrm>
-            <a:off x="838200" y="365125"/>
+            <a:off x="609600" y="2267077"/>
             <a:ext cx="10515600" cy="805307"/>
           </a:xfrm>
         </p:spPr>
         <p:txBody>
-          <a:bodyPr/>
+          <a:bodyPr>
+            <a:normAutofit fontScale="90000"/>
+          </a:bodyPr>
           <a:lstStyle/>
           <a:p>
             <a:pPr algn="ctr"/>
             <a:r>
-              <a:rPr lang="en-US" b="1" dirty="0"/>
+              <a:rPr lang="en-US" sz="5400" b="1" dirty="0"/>
               <a:t>A/B Testing</a:t>
             </a:r>
-            <a:endParaRPr lang="en-US" dirty="0"/>
+            <a:endParaRPr lang="en-US" sz="5400" dirty="0"/>
           </a:p>
         </p:txBody>
       </p:sp>
@@ -3926,10 +3928,10 @@
       </p:sp>
       <p:sp>
         <p:nvSpPr>
-          <p:cNvPr id="2" name="TextBox 1">
-            <a:extLst>
-              <a:ext uri="{FF2B5EF4-FFF2-40B4-BE49-F238E27FC236}">
-                <a16:creationId xmlns:a16="http://schemas.microsoft.com/office/drawing/2014/main" id="{2E22DB66-A97D-4ADE-0FAF-7FF5137BEA10}"/>
+          <p:cNvPr id="8" name="TextBox 7">
+            <a:extLst>
+              <a:ext uri="{FF2B5EF4-FFF2-40B4-BE49-F238E27FC236}">
+                <a16:creationId xmlns:a16="http://schemas.microsoft.com/office/drawing/2014/main" id="{EC295F11-B8DA-BEB9-919B-B59E6EC87444}"/>
               </a:ext>
             </a:extLst>
           </p:cNvPr>
@@ -3938,7 +3940,7 @@
         </p:nvSpPr>
         <p:spPr>
           <a:xfrm>
-            <a:off x="5925312" y="3017520"/>
+            <a:off x="5922264" y="2961538"/>
             <a:ext cx="558166" cy="830997"/>
           </a:xfrm>
           <a:prstGeom prst="rect">
@@ -3965,10 +3967,10 @@
       </p:sp>
       <p:sp>
         <p:nvSpPr>
-          <p:cNvPr id="4" name="TextBox 3">
-            <a:extLst>
-              <a:ext uri="{FF2B5EF4-FFF2-40B4-BE49-F238E27FC236}">
-                <a16:creationId xmlns:a16="http://schemas.microsoft.com/office/drawing/2014/main" id="{92D4041A-BFAA-C150-F3E7-875DCBD273C1}"/>
+          <p:cNvPr id="9" name="TextBox 8">
+            <a:extLst>
+              <a:ext uri="{FF2B5EF4-FFF2-40B4-BE49-F238E27FC236}">
+                <a16:creationId xmlns:a16="http://schemas.microsoft.com/office/drawing/2014/main" id="{6D700D2B-00D6-3F6C-7A59-A7409ECD6798}"/>
               </a:ext>
             </a:extLst>
           </p:cNvPr>
@@ -3977,7 +3979,7 @@
         </p:nvSpPr>
         <p:spPr>
           <a:xfrm>
-            <a:off x="5967984" y="5376672"/>
+            <a:off x="5922264" y="5409063"/>
             <a:ext cx="529312" cy="830997"/>
           </a:xfrm>
           <a:prstGeom prst="rect">
@@ -3994,7 +3996,7 @@
             <a:r>
               <a:rPr lang="en-US" sz="4800" b="1" dirty="0">
                 <a:solidFill>
-                  <a:srgbClr val="92D050"/>
+                  <a:srgbClr val="00B0F0"/>
                 </a:solidFill>
               </a:rPr>
               <a:t>B</a:t>
@@ -4004,10 +4006,10 @@
       </p:sp>
       <p:pic>
         <p:nvPicPr>
-          <p:cNvPr id="5" name="Picture 4">
-            <a:extLst>
-              <a:ext uri="{FF2B5EF4-FFF2-40B4-BE49-F238E27FC236}">
-                <a16:creationId xmlns:a16="http://schemas.microsoft.com/office/drawing/2014/main" id="{2242D774-B8BA-16BD-CE08-919DFA00C436}"/>
+          <p:cNvPr id="10" name="Picture 9">
+            <a:extLst>
+              <a:ext uri="{FF2B5EF4-FFF2-40B4-BE49-F238E27FC236}">
+                <a16:creationId xmlns:a16="http://schemas.microsoft.com/office/drawing/2014/main" id="{BCA89CD6-D4E5-E0A6-0E51-F30614CEBEE9}"/>
               </a:ext>
             </a:extLst>
           </p:cNvPr>
@@ -4024,8 +4026,8 @@
         </p:blipFill>
         <p:spPr>
           <a:xfrm>
-            <a:off x="6571143" y="3081528"/>
-            <a:ext cx="5370921" cy="1538946"/>
+            <a:off x="6922008" y="2961538"/>
+            <a:ext cx="5081929" cy="1456140"/>
           </a:xfrm>
           <a:prstGeom prst="rect">
             <a:avLst/>
@@ -4034,10 +4036,10 @@
       </p:pic>
       <p:pic>
         <p:nvPicPr>
-          <p:cNvPr id="6" name="Picture 5">
-            <a:extLst>
-              <a:ext uri="{FF2B5EF4-FFF2-40B4-BE49-F238E27FC236}">
-                <a16:creationId xmlns:a16="http://schemas.microsoft.com/office/drawing/2014/main" id="{75976C37-B65C-58A0-4B48-18C88DC20E60}"/>
+          <p:cNvPr id="11" name="Picture 10">
+            <a:extLst>
+              <a:ext uri="{FF2B5EF4-FFF2-40B4-BE49-F238E27FC236}">
+                <a16:creationId xmlns:a16="http://schemas.microsoft.com/office/drawing/2014/main" id="{6DFD3EC1-C748-FCCC-5D47-2CCC4B6C56A5}"/>
               </a:ext>
             </a:extLst>
           </p:cNvPr>
@@ -4054,8 +4056,8 @@
         </p:blipFill>
         <p:spPr>
           <a:xfrm>
-            <a:off x="6571143" y="5192733"/>
-            <a:ext cx="5386541" cy="1543422"/>
+            <a:off x="6942428" y="5064271"/>
+            <a:ext cx="5081932" cy="1456141"/>
           </a:xfrm>
           <a:prstGeom prst="rect">
             <a:avLst/>
@@ -4064,10 +4066,10 @@
       </p:pic>
       <p:sp>
         <p:nvSpPr>
-          <p:cNvPr id="7" name="TextBox 6">
-            <a:extLst>
-              <a:ext uri="{FF2B5EF4-FFF2-40B4-BE49-F238E27FC236}">
-                <a16:creationId xmlns:a16="http://schemas.microsoft.com/office/drawing/2014/main" id="{E52C305E-CEE5-B32A-CD20-AFC25EB0EEEB}"/>
+          <p:cNvPr id="12" name="TextBox 11">
+            <a:extLst>
+              <a:ext uri="{FF2B5EF4-FFF2-40B4-BE49-F238E27FC236}">
+                <a16:creationId xmlns:a16="http://schemas.microsoft.com/office/drawing/2014/main" id="{7A597629-457D-982B-B676-AAF8F9EE0C10}"/>
               </a:ext>
             </a:extLst>
           </p:cNvPr>
@@ -4076,8 +4078,8 @@
         </p:nvSpPr>
         <p:spPr>
           <a:xfrm>
-            <a:off x="7040880" y="5980176"/>
-            <a:ext cx="1882503" cy="523220"/>
+            <a:off x="6942428" y="5774775"/>
+            <a:ext cx="2366161" cy="646331"/>
           </a:xfrm>
           <a:prstGeom prst="rect">
             <a:avLst/>
@@ -4091,9 +4093,9 @@
           <a:lstStyle/>
           <a:p>
             <a:r>
-              <a:rPr lang="en-US" sz="1400" b="1" dirty="0">
-                <a:solidFill>
-                  <a:srgbClr val="00B050"/>
+              <a:rPr lang="en-US" b="1" dirty="0">
+                <a:solidFill>
+                  <a:srgbClr val="00B0F0"/>
                 </a:solidFill>
               </a:rPr>
               <a:t>Chatbot:</a:t>
@@ -4101,9 +4103,9 @@
           </a:p>
           <a:p>
             <a:r>
-              <a:rPr lang="en-US" sz="1400" b="1" dirty="0">
-                <a:solidFill>
-                  <a:srgbClr val="00B050"/>
+              <a:rPr lang="en-US" b="1" dirty="0">
+                <a:solidFill>
+                  <a:srgbClr val="00B0F0"/>
                 </a:solidFill>
               </a:rPr>
               <a:t>Hello. How can I help ?</a:t>
@@ -5023,7 +5025,7 @@
                   </a:schemeClr>
                 </a:solidFill>
               </a:rPr>
-              <a:t>Data-driven decisions  and Removes guessing</a:t>
+              <a:t>Data-driven decisions  and removes guessing</a:t>
             </a:r>
           </a:p>
           <a:p>
@@ -5047,10 +5049,10 @@
       </p:sp>
       <p:sp>
         <p:nvSpPr>
-          <p:cNvPr id="2" name="TextBox 1">
-            <a:extLst>
-              <a:ext uri="{FF2B5EF4-FFF2-40B4-BE49-F238E27FC236}">
-                <a16:creationId xmlns:a16="http://schemas.microsoft.com/office/drawing/2014/main" id="{D9298F8B-6B9D-1FA1-FE32-B5956A170417}"/>
+          <p:cNvPr id="8" name="TextBox 7">
+            <a:extLst>
+              <a:ext uri="{FF2B5EF4-FFF2-40B4-BE49-F238E27FC236}">
+                <a16:creationId xmlns:a16="http://schemas.microsoft.com/office/drawing/2014/main" id="{B29C2C62-941F-88CF-193D-9C0C8CD868D3}"/>
               </a:ext>
             </a:extLst>
           </p:cNvPr>
@@ -5059,7 +5061,7 @@
         </p:nvSpPr>
         <p:spPr>
           <a:xfrm>
-            <a:off x="5925312" y="3017520"/>
+            <a:off x="5922264" y="2961538"/>
             <a:ext cx="558166" cy="830997"/>
           </a:xfrm>
           <a:prstGeom prst="rect">
@@ -5086,10 +5088,10 @@
       </p:sp>
       <p:sp>
         <p:nvSpPr>
-          <p:cNvPr id="4" name="TextBox 3">
-            <a:extLst>
-              <a:ext uri="{FF2B5EF4-FFF2-40B4-BE49-F238E27FC236}">
-                <a16:creationId xmlns:a16="http://schemas.microsoft.com/office/drawing/2014/main" id="{C2B53C97-9EAD-428C-675C-34ADC6253EDD}"/>
+          <p:cNvPr id="9" name="TextBox 8">
+            <a:extLst>
+              <a:ext uri="{FF2B5EF4-FFF2-40B4-BE49-F238E27FC236}">
+                <a16:creationId xmlns:a16="http://schemas.microsoft.com/office/drawing/2014/main" id="{261DE978-C6B6-2C74-F800-BCAF6815B843}"/>
               </a:ext>
             </a:extLst>
           </p:cNvPr>
@@ -5098,7 +5100,7 @@
         </p:nvSpPr>
         <p:spPr>
           <a:xfrm>
-            <a:off x="5967984" y="5376672"/>
+            <a:off x="5922264" y="5409063"/>
             <a:ext cx="529312" cy="830997"/>
           </a:xfrm>
           <a:prstGeom prst="rect">
@@ -5115,7 +5117,7 @@
             <a:r>
               <a:rPr lang="en-US" sz="4800" b="1" dirty="0">
                 <a:solidFill>
-                  <a:srgbClr val="92D050"/>
+                  <a:srgbClr val="00B0F0"/>
                 </a:solidFill>
               </a:rPr>
               <a:t>B</a:t>
@@ -5125,10 +5127,10 @@
       </p:sp>
       <p:pic>
         <p:nvPicPr>
-          <p:cNvPr id="5" name="Picture 4">
-            <a:extLst>
-              <a:ext uri="{FF2B5EF4-FFF2-40B4-BE49-F238E27FC236}">
-                <a16:creationId xmlns:a16="http://schemas.microsoft.com/office/drawing/2014/main" id="{2CB7356A-6217-2856-2266-9D8BDE407DE7}"/>
+          <p:cNvPr id="10" name="Picture 9">
+            <a:extLst>
+              <a:ext uri="{FF2B5EF4-FFF2-40B4-BE49-F238E27FC236}">
+                <a16:creationId xmlns:a16="http://schemas.microsoft.com/office/drawing/2014/main" id="{E929EE1F-225B-722A-43A6-DF6D5E31B599}"/>
               </a:ext>
             </a:extLst>
           </p:cNvPr>
@@ -5145,8 +5147,8 @@
         </p:blipFill>
         <p:spPr>
           <a:xfrm>
-            <a:off x="6571143" y="3081528"/>
-            <a:ext cx="5370921" cy="1538946"/>
+            <a:off x="6922008" y="2961538"/>
+            <a:ext cx="5081929" cy="1456140"/>
           </a:xfrm>
           <a:prstGeom prst="rect">
             <a:avLst/>
@@ -5155,10 +5157,10 @@
       </p:pic>
       <p:pic>
         <p:nvPicPr>
-          <p:cNvPr id="6" name="Picture 5">
-            <a:extLst>
-              <a:ext uri="{FF2B5EF4-FFF2-40B4-BE49-F238E27FC236}">
-                <a16:creationId xmlns:a16="http://schemas.microsoft.com/office/drawing/2014/main" id="{E0E4BB8A-8C35-2353-3024-589925494E9D}"/>
+          <p:cNvPr id="11" name="Picture 10">
+            <a:extLst>
+              <a:ext uri="{FF2B5EF4-FFF2-40B4-BE49-F238E27FC236}">
+                <a16:creationId xmlns:a16="http://schemas.microsoft.com/office/drawing/2014/main" id="{2D88A61E-7E21-8AC0-3D33-6DBBABE6E211}"/>
               </a:ext>
             </a:extLst>
           </p:cNvPr>
@@ -5175,8 +5177,8 @@
         </p:blipFill>
         <p:spPr>
           <a:xfrm>
-            <a:off x="6571143" y="5192733"/>
-            <a:ext cx="5386541" cy="1543422"/>
+            <a:off x="6942428" y="5064271"/>
+            <a:ext cx="5081932" cy="1456141"/>
           </a:xfrm>
           <a:prstGeom prst="rect">
             <a:avLst/>
@@ -5185,10 +5187,10 @@
       </p:pic>
       <p:sp>
         <p:nvSpPr>
-          <p:cNvPr id="7" name="TextBox 6">
-            <a:extLst>
-              <a:ext uri="{FF2B5EF4-FFF2-40B4-BE49-F238E27FC236}">
-                <a16:creationId xmlns:a16="http://schemas.microsoft.com/office/drawing/2014/main" id="{DE266677-6D18-055D-156B-CE0692FD3482}"/>
+          <p:cNvPr id="12" name="TextBox 11">
+            <a:extLst>
+              <a:ext uri="{FF2B5EF4-FFF2-40B4-BE49-F238E27FC236}">
+                <a16:creationId xmlns:a16="http://schemas.microsoft.com/office/drawing/2014/main" id="{1EAAE32E-FEE6-5A8B-5132-58DEB76FDED9}"/>
               </a:ext>
             </a:extLst>
           </p:cNvPr>
@@ -5197,8 +5199,8 @@
         </p:nvSpPr>
         <p:spPr>
           <a:xfrm>
-            <a:off x="7040880" y="5980176"/>
-            <a:ext cx="1882503" cy="523220"/>
+            <a:off x="6942428" y="5774775"/>
+            <a:ext cx="2366161" cy="646331"/>
           </a:xfrm>
           <a:prstGeom prst="rect">
             <a:avLst/>
@@ -5212,9 +5214,9 @@
           <a:lstStyle/>
           <a:p>
             <a:r>
-              <a:rPr lang="en-US" sz="1400" b="1" dirty="0">
-                <a:solidFill>
-                  <a:srgbClr val="00B050"/>
+              <a:rPr lang="en-US" b="1" dirty="0">
+                <a:solidFill>
+                  <a:srgbClr val="00B0F0"/>
                 </a:solidFill>
               </a:rPr>
               <a:t>Chatbot:</a:t>
@@ -5222,9 +5224,9 @@
           </a:p>
           <a:p>
             <a:r>
-              <a:rPr lang="en-US" sz="1400" b="1" dirty="0">
-                <a:solidFill>
-                  <a:srgbClr val="00B050"/>
+              <a:rPr lang="en-US" b="1" dirty="0">
+                <a:solidFill>
+                  <a:srgbClr val="00B0F0"/>
                 </a:solidFill>
               </a:rPr>
               <a:t>Hello. How can I help ?</a:t>
@@ -5646,7 +5648,7 @@
                         <a:buNone/>
                       </a:pPr>
                       <a:r>
-                        <a:rPr lang="en-US" sz="2400">
+                        <a:rPr lang="en-US" sz="2400" dirty="0">
                           <a:solidFill>
                             <a:schemeClr val="accent6">
                               <a:lumMod val="60000"/>
@@ -5727,7 +5729,7 @@
                         <a:buNone/>
                       </a:pPr>
                       <a:r>
-                        <a:rPr lang="en-US" sz="2400">
+                        <a:rPr lang="en-US" sz="2400" dirty="0">
                           <a:solidFill>
                             <a:schemeClr val="accent6">
                               <a:lumMod val="60000"/>
@@ -6102,7 +6104,7 @@
         </p:nvSpPr>
         <p:spPr>
           <a:xfrm>
-            <a:off x="758952" y="572947"/>
+            <a:off x="293082" y="591235"/>
             <a:ext cx="10067544" cy="4524315"/>
           </a:xfrm>
           <a:prstGeom prst="rect">
@@ -6158,7 +6160,20 @@
                   </a:schemeClr>
                 </a:solidFill>
               </a:rPr>
-              <a:t>) is a </a:t>
+              <a:t>) </a:t>
+            </a:r>
+          </a:p>
+          <a:p>
+            <a:r>
+              <a:rPr lang="en-US" sz="2400" dirty="0">
+                <a:solidFill>
+                  <a:schemeClr val="accent6">
+                    <a:lumMod val="60000"/>
+                    <a:lumOff val="40000"/>
+                  </a:schemeClr>
+                </a:solidFill>
+              </a:rPr>
+              <a:t>It is a </a:t>
             </a:r>
             <a:r>
               <a:rPr lang="en-US" sz="2400" b="1" dirty="0">
@@ -6238,41 +6253,6 @@
             </a:endParaRPr>
           </a:p>
           <a:p>
-            <a:r>
-              <a:rPr lang="en-US" sz="2400" dirty="0">
-                <a:solidFill>
-                  <a:schemeClr val="accent6">
-                    <a:lumMod val="60000"/>
-                    <a:lumOff val="40000"/>
-                  </a:schemeClr>
-                </a:solidFill>
-              </a:rPr>
-              <a:t>It is widely used in </a:t>
-            </a:r>
-            <a:r>
-              <a:rPr lang="en-US" sz="2400" b="1" dirty="0">
-                <a:solidFill>
-                  <a:schemeClr val="accent6">
-                    <a:lumMod val="60000"/>
-                    <a:lumOff val="40000"/>
-                  </a:schemeClr>
-                </a:solidFill>
-              </a:rPr>
-              <a:t>data science, product development, marketing, and AI systems</a:t>
-            </a:r>
-            <a:r>
-              <a:rPr lang="en-US" sz="2400" dirty="0">
-                <a:solidFill>
-                  <a:schemeClr val="accent6">
-                    <a:lumMod val="60000"/>
-                    <a:lumOff val="40000"/>
-                  </a:schemeClr>
-                </a:solidFill>
-              </a:rPr>
-              <a:t>.</a:t>
-            </a:r>
-          </a:p>
-          <a:p>
             <a:endParaRPr lang="en-US" sz="2400" dirty="0">
               <a:solidFill>
                 <a:schemeClr val="accent6">
@@ -6283,7 +6263,44 @@
             </a:endParaRPr>
           </a:p>
           <a:p>
-            <a:endParaRPr lang="en-US" sz="2400" dirty="0">
+            <a:r>
+              <a:rPr lang="en-US" sz="2400" b="1" dirty="0">
+                <a:solidFill>
+                  <a:schemeClr val="accent6">
+                    <a:lumMod val="60000"/>
+                    <a:lumOff val="40000"/>
+                  </a:schemeClr>
+                </a:solidFill>
+              </a:rPr>
+              <a:t>Idea: </a:t>
+            </a:r>
+          </a:p>
+          <a:p>
+            <a:r>
+              <a:rPr lang="en-US" sz="2400" dirty="0">
+                <a:solidFill>
+                  <a:schemeClr val="accent6">
+                    <a:lumMod val="60000"/>
+                    <a:lumOff val="40000"/>
+                  </a:schemeClr>
+                </a:solidFill>
+              </a:rPr>
+              <a:t>A/B testing = show Version A to one group and Version B to another group, then measuring which performs better </a:t>
+            </a:r>
+            <a:r>
+              <a:rPr lang="en-US" sz="2400" b="1" dirty="0">
+                <a:solidFill>
+                  <a:schemeClr val="accent6">
+                    <a:lumMod val="60000"/>
+                    <a:lumOff val="40000"/>
+                  </a:schemeClr>
+                </a:solidFill>
+              </a:rPr>
+              <a:t>using data.</a:t>
+            </a:r>
+          </a:p>
+          <a:p>
+            <a:endParaRPr lang="en-US" sz="2400" b="1" dirty="0">
               <a:solidFill>
                 <a:schemeClr val="accent6">
                   <a:lumMod val="60000"/>
@@ -6293,7 +6310,7 @@
             </a:endParaRPr>
           </a:p>
           <a:p>
-            <a:endParaRPr lang="en-US" sz="2400" dirty="0">
+            <a:endParaRPr lang="en-US" sz="2400" b="1" dirty="0">
               <a:solidFill>
                 <a:schemeClr val="accent6">
                   <a:lumMod val="60000"/>
@@ -6312,12 +6329,10 @@
                   </a:schemeClr>
                 </a:solidFill>
               </a:rPr>
-              <a:t>Idea: </a:t>
-            </a:r>
-          </a:p>
-          <a:p>
-            <a:r>
-              <a:rPr lang="en-US" sz="2400" dirty="0">
+              <a:t>It is widely used in </a:t>
+            </a:r>
+            <a:r>
+              <a:rPr lang="en-US" sz="2400" b="1" dirty="0">
                 <a:solidFill>
                   <a:schemeClr val="accent6">
                     <a:lumMod val="60000"/>
@@ -6325,10 +6340,10 @@
                   </a:schemeClr>
                 </a:solidFill>
               </a:rPr>
-              <a:t>A/B testing = show Version A to one group and Version B to another group, then measuring which performs better </a:t>
-            </a:r>
-            <a:r>
-              <a:rPr lang="en-US" sz="2400" b="1" dirty="0">
+              <a:t>data science, product development, marketing, and AI systems</a:t>
+            </a:r>
+            <a:r>
+              <a:rPr lang="en-US" sz="2400" dirty="0">
                 <a:solidFill>
                   <a:schemeClr val="accent6">
                     <a:lumMod val="60000"/>
@@ -6336,7 +6351,7 @@
                   </a:schemeClr>
                 </a:solidFill>
               </a:rPr>
-              <a:t>using data.</a:t>
+              <a:t>.</a:t>
             </a:r>
           </a:p>
         </p:txBody>
@@ -6355,8 +6370,8 @@
         </p:nvSpPr>
         <p:spPr>
           <a:xfrm>
-            <a:off x="8622792" y="5349240"/>
-            <a:ext cx="558166" cy="830997"/>
+            <a:off x="9974096" y="1472184"/>
+            <a:ext cx="651140" cy="1015663"/>
           </a:xfrm>
           <a:prstGeom prst="rect">
             <a:avLst/>
@@ -6370,7 +6385,7 @@
           <a:lstStyle/>
           <a:p>
             <a:r>
-              <a:rPr lang="en-US" sz="4800" b="1" dirty="0">
+              <a:rPr lang="en-US" sz="6000" b="1" dirty="0">
                 <a:solidFill>
                   <a:srgbClr val="FFFF00"/>
                 </a:solidFill>
@@ -6394,8 +6409,8 @@
         </p:nvSpPr>
         <p:spPr>
           <a:xfrm>
-            <a:off x="9552432" y="5376672"/>
-            <a:ext cx="529312" cy="830997"/>
+            <a:off x="10903736" y="1499616"/>
+            <a:ext cx="615874" cy="1015663"/>
           </a:xfrm>
           <a:prstGeom prst="rect">
             <a:avLst/>
@@ -6409,9 +6424,9 @@
           <a:lstStyle/>
           <a:p>
             <a:r>
-              <a:rPr lang="en-US" sz="4800" b="1" dirty="0">
-                <a:solidFill>
-                  <a:srgbClr val="92D050"/>
+              <a:rPr lang="en-US" sz="6000" b="1" dirty="0">
+                <a:solidFill>
+                  <a:srgbClr val="E89D38"/>
                 </a:solidFill>
               </a:rPr>
               <a:t>B</a:t>
@@ -6469,8 +6484,8 @@
         </p:nvSpPr>
         <p:spPr>
           <a:xfrm>
-            <a:off x="150876" y="327398"/>
-            <a:ext cx="10072116" cy="4154984"/>
+            <a:off x="150876" y="-47506"/>
+            <a:ext cx="10072116" cy="1200329"/>
           </a:xfrm>
           <a:prstGeom prst="rect">
             <a:avLst/>
@@ -6484,7 +6499,7 @@
           <a:lstStyle/>
           <a:p>
             <a:r>
-              <a:rPr lang="en-US" sz="2400" dirty="0">
+              <a:rPr lang="en-US" sz="2400" b="1" dirty="0">
                 <a:solidFill>
                   <a:schemeClr val="accent6">
                     <a:lumMod val="60000"/>
@@ -6492,7 +6507,7 @@
                   </a:schemeClr>
                 </a:solidFill>
               </a:rPr>
-              <a:t>Example (Website Without/With Chatbot)</a:t>
+              <a:t>Example: (Website Without/With Chatbot)</a:t>
             </a:r>
           </a:p>
           <a:p>
@@ -6505,7 +6520,7 @@
                   </a:schemeClr>
                 </a:solidFill>
               </a:rPr>
-              <a:t>Imagine you run a website.</a:t>
+              <a:t>Imagine you run a website. You create a new website with chatbot.</a:t>
             </a:r>
           </a:p>
           <a:p>
@@ -6518,166 +6533,6 @@
               </a:solidFill>
             </a:endParaRPr>
           </a:p>
-          <a:p>
-            <a:endParaRPr lang="en-US" sz="2400" dirty="0">
-              <a:solidFill>
-                <a:schemeClr val="accent6">
-                  <a:lumMod val="60000"/>
-                  <a:lumOff val="40000"/>
-                </a:schemeClr>
-              </a:solidFill>
-            </a:endParaRPr>
-          </a:p>
-          <a:p>
-            <a:endParaRPr lang="en-US" sz="2400" dirty="0">
-              <a:solidFill>
-                <a:schemeClr val="accent6">
-                  <a:lumMod val="60000"/>
-                  <a:lumOff val="40000"/>
-                </a:schemeClr>
-              </a:solidFill>
-            </a:endParaRPr>
-          </a:p>
-          <a:p>
-            <a:endParaRPr lang="en-US" sz="2400" dirty="0">
-              <a:solidFill>
-                <a:schemeClr val="accent6">
-                  <a:lumMod val="60000"/>
-                  <a:lumOff val="40000"/>
-                </a:schemeClr>
-              </a:solidFill>
-            </a:endParaRPr>
-          </a:p>
-          <a:p>
-            <a:r>
-              <a:rPr lang="en-US" sz="2400" b="1" dirty="0">
-                <a:solidFill>
-                  <a:schemeClr val="accent6">
-                    <a:lumMod val="60000"/>
-                    <a:lumOff val="40000"/>
-                  </a:schemeClr>
-                </a:solidFill>
-              </a:rPr>
-              <a:t>Conversion Rate:</a:t>
-            </a:r>
-            <a:endParaRPr lang="en-US" sz="2400" dirty="0">
-              <a:solidFill>
-                <a:schemeClr val="accent6">
-                  <a:lumMod val="60000"/>
-                  <a:lumOff val="40000"/>
-                </a:schemeClr>
-              </a:solidFill>
-            </a:endParaRPr>
-          </a:p>
-          <a:p>
-            <a:r>
-              <a:rPr lang="en-US" sz="2400" dirty="0">
-                <a:solidFill>
-                  <a:schemeClr val="accent6">
-                    <a:lumMod val="60000"/>
-                    <a:lumOff val="40000"/>
-                  </a:schemeClr>
-                </a:solidFill>
-              </a:rPr>
-              <a:t>A → 80 / 1000 = </a:t>
-            </a:r>
-            <a:r>
-              <a:rPr lang="en-US" sz="2400" b="1" dirty="0">
-                <a:solidFill>
-                  <a:schemeClr val="accent6">
-                    <a:lumMod val="60000"/>
-                    <a:lumOff val="40000"/>
-                  </a:schemeClr>
-                </a:solidFill>
-              </a:rPr>
-              <a:t>8%</a:t>
-            </a:r>
-            <a:endParaRPr lang="en-US" sz="2400" dirty="0">
-              <a:solidFill>
-                <a:schemeClr val="accent6">
-                  <a:lumMod val="60000"/>
-                  <a:lumOff val="40000"/>
-                </a:schemeClr>
-              </a:solidFill>
-            </a:endParaRPr>
-          </a:p>
-          <a:p>
-            <a:r>
-              <a:rPr lang="en-US" sz="2400" dirty="0">
-                <a:solidFill>
-                  <a:schemeClr val="accent6">
-                    <a:lumMod val="60000"/>
-                    <a:lumOff val="40000"/>
-                  </a:schemeClr>
-                </a:solidFill>
-              </a:rPr>
-              <a:t>B → 120 / 1000 = </a:t>
-            </a:r>
-            <a:r>
-              <a:rPr lang="en-US" sz="2400" b="1" dirty="0">
-                <a:solidFill>
-                  <a:schemeClr val="accent6">
-                    <a:lumMod val="60000"/>
-                    <a:lumOff val="40000"/>
-                  </a:schemeClr>
-                </a:solidFill>
-              </a:rPr>
-              <a:t>12%</a:t>
-            </a:r>
-            <a:endParaRPr lang="en-US" sz="2400" dirty="0">
-              <a:solidFill>
-                <a:schemeClr val="accent6">
-                  <a:lumMod val="60000"/>
-                  <a:lumOff val="40000"/>
-                </a:schemeClr>
-              </a:solidFill>
-            </a:endParaRPr>
-          </a:p>
-          <a:p>
-            <a:endParaRPr lang="en-US" sz="2400" dirty="0">
-              <a:solidFill>
-                <a:schemeClr val="accent6">
-                  <a:lumMod val="60000"/>
-                  <a:lumOff val="40000"/>
-                </a:schemeClr>
-              </a:solidFill>
-            </a:endParaRPr>
-          </a:p>
-          <a:p>
-            <a:r>
-              <a:rPr lang="en-US" sz="2400" dirty="0">
-                <a:solidFill>
-                  <a:schemeClr val="accent6">
-                    <a:lumMod val="60000"/>
-                    <a:lumOff val="40000"/>
-                  </a:schemeClr>
-                </a:solidFill>
-              </a:rPr>
-              <a:t>So, Version </a:t>
-            </a:r>
-            <a:r>
-              <a:rPr lang="en-US" sz="2400" b="1" dirty="0">
-                <a:solidFill>
-                  <a:schemeClr val="accent6">
-                    <a:lumMod val="60000"/>
-                    <a:lumOff val="40000"/>
-                  </a:schemeClr>
-                </a:solidFill>
-              </a:rPr>
-              <a:t>B performs better</a:t>
-            </a:r>
-            <a:r>
-              <a:rPr lang="en-US" sz="2400" dirty="0">
-                <a:solidFill>
-                  <a:schemeClr val="accent6">
-                    <a:lumMod val="60000"/>
-                    <a:lumOff val="40000"/>
-                  </a:schemeClr>
-                </a:solidFill>
-              </a:rPr>
-              <a:t>.</a:t>
-            </a:r>
-          </a:p>
         </p:txBody>
       </p:sp>
       <p:graphicFrame>
@@ -6695,42 +6550,42 @@
           <p:nvPr>
             <p:extLst>
               <p:ext uri="{D42A27DB-BD31-4B8C-83A1-F6EECF244321}">
-                <p14:modId xmlns:p14="http://schemas.microsoft.com/office/powerpoint/2010/main" val="3874236231"/>
+                <p14:modId xmlns:p14="http://schemas.microsoft.com/office/powerpoint/2010/main" val="1124951675"/>
               </p:ext>
             </p:extLst>
           </p:nvPr>
         </p:nvGraphicFramePr>
         <p:xfrm>
-          <a:off x="4102608" y="1294670"/>
-          <a:ext cx="7839456" cy="1371600"/>
+          <a:off x="150876" y="1068723"/>
+          <a:ext cx="6624828" cy="1737360"/>
         </p:xfrm>
         <a:graphic>
           <a:graphicData uri="http://schemas.openxmlformats.org/drawingml/2006/table">
             <a:tbl>
               <a:tblPr/>
               <a:tblGrid>
-                <a:gridCol w="1539240">
+                <a:gridCol w="1668780">
                   <a:extLst>
                     <a:ext uri="{9D8B030D-6E8A-4147-A177-3AD203B41FA5}">
                       <a16:colId xmlns:a16="http://schemas.microsoft.com/office/drawing/2014/main" val="2313327725"/>
                     </a:ext>
                   </a:extLst>
                 </a:gridCol>
-                <a:gridCol w="2578608">
+                <a:gridCol w="1847088">
                   <a:extLst>
                     <a:ext uri="{9D8B030D-6E8A-4147-A177-3AD203B41FA5}">
                       <a16:colId xmlns:a16="http://schemas.microsoft.com/office/drawing/2014/main" val="154814501"/>
                     </a:ext>
                   </a:extLst>
                 </a:gridCol>
-                <a:gridCol w="1901952">
+                <a:gridCol w="1527048">
                   <a:extLst>
                     <a:ext uri="{9D8B030D-6E8A-4147-A177-3AD203B41FA5}">
                       <a16:colId xmlns:a16="http://schemas.microsoft.com/office/drawing/2014/main" val="3961941874"/>
                     </a:ext>
                   </a:extLst>
                 </a:gridCol>
-                <a:gridCol w="1819656">
+                <a:gridCol w="1581912">
                   <a:extLst>
                     <a:ext uri="{9D8B030D-6E8A-4147-A177-3AD203B41FA5}">
                       <a16:colId xmlns:a16="http://schemas.microsoft.com/office/drawing/2014/main" val="1883157114"/>
@@ -6911,7 +6766,7 @@
                             </a:schemeClr>
                           </a:solidFill>
                         </a:rPr>
-                        <a:t>A</a:t>
+                        <a:t>A(Control)</a:t>
                       </a:r>
                     </a:p>
                   </a:txBody>
@@ -7058,7 +6913,7 @@
                         <a:buNone/>
                       </a:pPr>
                       <a:r>
-                        <a:rPr lang="en-US" sz="2400">
+                        <a:rPr lang="en-US" sz="2400" dirty="0">
                           <a:solidFill>
                             <a:schemeClr val="accent6">
                               <a:lumMod val="60000"/>
@@ -7066,7 +6921,7 @@
                             </a:schemeClr>
                           </a:solidFill>
                         </a:rPr>
-                        <a:t>B</a:t>
+                        <a:t>B(Variant)</a:t>
                       </a:r>
                     </a:p>
                   </a:txBody>
@@ -7132,7 +6987,7 @@
                         <a:buNone/>
                       </a:pPr>
                       <a:r>
-                        <a:rPr lang="en-US" sz="2400">
+                        <a:rPr lang="en-US" sz="2400" dirty="0">
                           <a:solidFill>
                             <a:schemeClr val="accent6">
                               <a:lumMod val="60000"/>
@@ -7260,7 +7115,7 @@
         </p:nvSpPr>
         <p:spPr>
           <a:xfrm>
-            <a:off x="4431792" y="5376672"/>
+            <a:off x="4431792" y="5266944"/>
             <a:ext cx="529312" cy="830997"/>
           </a:xfrm>
           <a:prstGeom prst="rect">
@@ -7277,7 +7132,7 @@
             <a:r>
               <a:rPr lang="en-US" sz="4800" b="1" dirty="0">
                 <a:solidFill>
-                  <a:srgbClr val="92D050"/>
+                  <a:srgbClr val="00B0F0"/>
                 </a:solidFill>
               </a:rPr>
               <a:t>B</a:t>
@@ -7307,7 +7162,7 @@
         </p:blipFill>
         <p:spPr>
           <a:xfrm>
-            <a:off x="5353049" y="2732504"/>
+            <a:off x="5414922" y="2529708"/>
             <a:ext cx="6589015" cy="1887970"/>
           </a:xfrm>
           <a:prstGeom prst="rect">
@@ -7337,7 +7192,7 @@
         </p:blipFill>
         <p:spPr>
           <a:xfrm>
-            <a:off x="5368669" y="4848185"/>
+            <a:off x="5435345" y="4632443"/>
             <a:ext cx="6589015" cy="1887970"/>
           </a:xfrm>
           <a:prstGeom prst="rect">
@@ -7359,7 +7214,7 @@
         </p:nvSpPr>
         <p:spPr>
           <a:xfrm>
-            <a:off x="5797296" y="5952744"/>
+            <a:off x="5797296" y="5779008"/>
             <a:ext cx="2366161" cy="646331"/>
           </a:xfrm>
           <a:prstGeom prst="rect">
@@ -7376,7 +7231,7 @@
             <a:r>
               <a:rPr lang="en-US" b="1" dirty="0">
                 <a:solidFill>
-                  <a:srgbClr val="00B050"/>
+                  <a:srgbClr val="00B0F0"/>
                 </a:solidFill>
               </a:rPr>
               <a:t>Chatbot:</a:t>
@@ -7386,10 +7241,169 @@
             <a:r>
               <a:rPr lang="en-US" b="1" dirty="0">
                 <a:solidFill>
-                  <a:srgbClr val="00B050"/>
+                  <a:srgbClr val="00B0F0"/>
                 </a:solidFill>
               </a:rPr>
               <a:t>Hello. How can I help ?</a:t>
+            </a:r>
+          </a:p>
+        </p:txBody>
+      </p:sp>
+      <p:sp>
+        <p:nvSpPr>
+          <p:cNvPr id="6" name="TextBox 5">
+            <a:extLst>
+              <a:ext uri="{FF2B5EF4-FFF2-40B4-BE49-F238E27FC236}">
+                <a16:creationId xmlns:a16="http://schemas.microsoft.com/office/drawing/2014/main" id="{ECD7FE49-0DF6-CC7B-DBAA-55800A56C419}"/>
+              </a:ext>
+            </a:extLst>
+          </p:cNvPr>
+          <p:cNvSpPr txBox="1"/>
+          <p:nvPr/>
+        </p:nvSpPr>
+        <p:spPr>
+          <a:xfrm>
+            <a:off x="37822" y="4121925"/>
+            <a:ext cx="4250713" cy="1938992"/>
+          </a:xfrm>
+          <a:prstGeom prst="rect">
+            <a:avLst/>
+          </a:prstGeom>
+          <a:noFill/>
+        </p:spPr>
+        <p:txBody>
+          <a:bodyPr wrap="square">
+            <a:spAutoFit/>
+          </a:bodyPr>
+          <a:lstStyle/>
+          <a:p>
+            <a:r>
+              <a:rPr lang="en-US" sz="2400" b="1" dirty="0">
+                <a:solidFill>
+                  <a:schemeClr val="accent6">
+                    <a:lumMod val="60000"/>
+                    <a:lumOff val="40000"/>
+                  </a:schemeClr>
+                </a:solidFill>
+              </a:rPr>
+              <a:t>Conversion Rate:</a:t>
+            </a:r>
+            <a:endParaRPr lang="en-US" sz="2400" dirty="0">
+              <a:solidFill>
+                <a:schemeClr val="accent6">
+                  <a:lumMod val="60000"/>
+                  <a:lumOff val="40000"/>
+                </a:schemeClr>
+              </a:solidFill>
+            </a:endParaRPr>
+          </a:p>
+          <a:p>
+            <a:r>
+              <a:rPr lang="en-US" sz="2400" dirty="0">
+                <a:solidFill>
+                  <a:schemeClr val="accent6">
+                    <a:lumMod val="60000"/>
+                    <a:lumOff val="40000"/>
+                  </a:schemeClr>
+                </a:solidFill>
+              </a:rPr>
+              <a:t>A → 80 / 1000 = </a:t>
+            </a:r>
+            <a:r>
+              <a:rPr lang="en-US" sz="2400" b="1" dirty="0">
+                <a:solidFill>
+                  <a:schemeClr val="accent6">
+                    <a:lumMod val="60000"/>
+                    <a:lumOff val="40000"/>
+                  </a:schemeClr>
+                </a:solidFill>
+              </a:rPr>
+              <a:t>8%</a:t>
+            </a:r>
+            <a:endParaRPr lang="en-US" sz="2400" dirty="0">
+              <a:solidFill>
+                <a:schemeClr val="accent6">
+                  <a:lumMod val="60000"/>
+                  <a:lumOff val="40000"/>
+                </a:schemeClr>
+              </a:solidFill>
+            </a:endParaRPr>
+          </a:p>
+          <a:p>
+            <a:r>
+              <a:rPr lang="en-US" sz="2400" dirty="0">
+                <a:solidFill>
+                  <a:schemeClr val="accent6">
+                    <a:lumMod val="60000"/>
+                    <a:lumOff val="40000"/>
+                  </a:schemeClr>
+                </a:solidFill>
+              </a:rPr>
+              <a:t>B → 120 / 1000 = </a:t>
+            </a:r>
+            <a:r>
+              <a:rPr lang="en-US" sz="2400" b="1" dirty="0">
+                <a:solidFill>
+                  <a:schemeClr val="accent6">
+                    <a:lumMod val="60000"/>
+                    <a:lumOff val="40000"/>
+                  </a:schemeClr>
+                </a:solidFill>
+              </a:rPr>
+              <a:t>12%</a:t>
+            </a:r>
+            <a:endParaRPr lang="en-US" sz="2400" dirty="0">
+              <a:solidFill>
+                <a:schemeClr val="accent6">
+                  <a:lumMod val="60000"/>
+                  <a:lumOff val="40000"/>
+                </a:schemeClr>
+              </a:solidFill>
+            </a:endParaRPr>
+          </a:p>
+          <a:p>
+            <a:endParaRPr lang="en-US" sz="2400" dirty="0">
+              <a:solidFill>
+                <a:schemeClr val="accent6">
+                  <a:lumMod val="60000"/>
+                  <a:lumOff val="40000"/>
+                </a:schemeClr>
+              </a:solidFill>
+            </a:endParaRPr>
+          </a:p>
+          <a:p>
+            <a:r>
+              <a:rPr lang="en-US" sz="2400" dirty="0">
+                <a:solidFill>
+                  <a:schemeClr val="accent6">
+                    <a:lumMod val="60000"/>
+                    <a:lumOff val="40000"/>
+                  </a:schemeClr>
+                </a:solidFill>
+              </a:rPr>
+              <a:t>So, Version </a:t>
+            </a:r>
+            <a:r>
+              <a:rPr lang="en-US" sz="2400" b="1" dirty="0">
+                <a:solidFill>
+                  <a:schemeClr val="accent6">
+                    <a:lumMod val="60000"/>
+                    <a:lumOff val="40000"/>
+                  </a:schemeClr>
+                </a:solidFill>
+              </a:rPr>
+              <a:t>B performs better</a:t>
+            </a:r>
+            <a:r>
+              <a:rPr lang="en-US" sz="2400" dirty="0">
+                <a:solidFill>
+                  <a:schemeClr val="accent6">
+                    <a:lumMod val="60000"/>
+                    <a:lumOff val="40000"/>
+                  </a:schemeClr>
+                </a:solidFill>
+              </a:rPr>
+              <a:t>.</a:t>
             </a:r>
           </a:p>
         </p:txBody>
@@ -7444,8 +7458,8 @@
         </p:nvSpPr>
         <p:spPr>
           <a:xfrm>
-            <a:off x="361188" y="802886"/>
-            <a:ext cx="9285732" cy="3416320"/>
+            <a:off x="214884" y="141581"/>
+            <a:ext cx="10181844" cy="3785652"/>
           </a:xfrm>
           <a:prstGeom prst="rect">
             <a:avLst/>
@@ -7459,7 +7473,7 @@
           <a:lstStyle/>
           <a:p>
             <a:r>
-              <a:rPr lang="en-US" sz="2400" dirty="0">
+              <a:rPr lang="en-US" sz="2400" b="1" dirty="0">
                 <a:solidFill>
                   <a:schemeClr val="accent6">
                     <a:lumMod val="60000"/>
@@ -7516,89 +7530,6 @@
             </a:r>
           </a:p>
           <a:p>
-            <a:r>
-              <a:rPr lang="en-US" sz="2400" dirty="0">
-                <a:solidFill>
-                  <a:schemeClr val="accent6">
-                    <a:lumMod val="60000"/>
-                    <a:lumOff val="40000"/>
-                  </a:schemeClr>
-                </a:solidFill>
-              </a:rPr>
-              <a:t>You now have:</a:t>
-            </a:r>
-          </a:p>
-          <a:p>
-            <a:r>
-              <a:rPr lang="en-US" sz="2400" b="1" dirty="0">
-                <a:solidFill>
-                  <a:schemeClr val="accent6">
-                    <a:lumMod val="60000"/>
-                    <a:lumOff val="40000"/>
-                  </a:schemeClr>
-                </a:solidFill>
-              </a:rPr>
-              <a:t>Model A (Control)</a:t>
-            </a:r>
-            <a:r>
-              <a:rPr lang="en-US" sz="2400" dirty="0">
-                <a:solidFill>
-                  <a:schemeClr val="accent6">
-                    <a:lumMod val="60000"/>
-                    <a:lumOff val="40000"/>
-                  </a:schemeClr>
-                </a:solidFill>
-              </a:rPr>
-              <a:t> → Old production model (Logistic Regression)</a:t>
-            </a:r>
-          </a:p>
-          <a:p>
-            <a:r>
-              <a:rPr lang="en-US" sz="2400" b="1" dirty="0">
-                <a:solidFill>
-                  <a:schemeClr val="accent6">
-                    <a:lumMod val="60000"/>
-                    <a:lumOff val="40000"/>
-                  </a:schemeClr>
-                </a:solidFill>
-              </a:rPr>
-              <a:t>Model B (Variant)</a:t>
-            </a:r>
-            <a:r>
-              <a:rPr lang="en-US" sz="2400" dirty="0">
-                <a:solidFill>
-                  <a:schemeClr val="accent6">
-                    <a:lumMod val="60000"/>
-                    <a:lumOff val="40000"/>
-                  </a:schemeClr>
-                </a:solidFill>
-              </a:rPr>
-              <a:t> → New model (Transformer / </a:t>
-            </a:r>
-            <a:r>
-              <a:rPr lang="en-US" sz="2400" dirty="0" err="1">
-                <a:solidFill>
-                  <a:schemeClr val="accent6">
-                    <a:lumMod val="60000"/>
-                    <a:lumOff val="40000"/>
-                  </a:schemeClr>
-                </a:solidFill>
-              </a:rPr>
-              <a:t>XGBoost</a:t>
-            </a:r>
-            <a:r>
-              <a:rPr lang="en-US" sz="2400" dirty="0">
-                <a:solidFill>
-                  <a:schemeClr val="accent6">
-                    <a:lumMod val="60000"/>
-                    <a:lumOff val="40000"/>
-                  </a:schemeClr>
-                </a:solidFill>
-              </a:rPr>
-              <a:t>)</a:t>
-            </a:r>
-          </a:p>
-          <a:p>
             <a:endParaRPr lang="en-US" sz="2400" dirty="0">
               <a:solidFill>
                 <a:schemeClr val="accent6">
@@ -7618,6 +7549,99 @@
                   </a:schemeClr>
                 </a:solidFill>
               </a:rPr>
+              <a:t>You now have:</a:t>
+            </a:r>
+          </a:p>
+          <a:p>
+            <a:r>
+              <a:rPr lang="en-US" sz="2400" b="1" dirty="0">
+                <a:solidFill>
+                  <a:schemeClr val="accent6">
+                    <a:lumMod val="60000"/>
+                    <a:lumOff val="40000"/>
+                  </a:schemeClr>
+                </a:solidFill>
+              </a:rPr>
+              <a:t>Model A (Control)</a:t>
+            </a:r>
+            <a:r>
+              <a:rPr lang="en-US" sz="2400" dirty="0">
+                <a:solidFill>
+                  <a:schemeClr val="accent6">
+                    <a:lumMod val="60000"/>
+                    <a:lumOff val="40000"/>
+                  </a:schemeClr>
+                </a:solidFill>
+              </a:rPr>
+              <a:t> → Old production model (Logistic Regression)</a:t>
+            </a:r>
+          </a:p>
+          <a:p>
+            <a:r>
+              <a:rPr lang="en-US" sz="2400" b="1" dirty="0">
+                <a:solidFill>
+                  <a:schemeClr val="accent6">
+                    <a:lumMod val="60000"/>
+                    <a:lumOff val="40000"/>
+                  </a:schemeClr>
+                </a:solidFill>
+              </a:rPr>
+              <a:t>Model B (Variant)</a:t>
+            </a:r>
+            <a:r>
+              <a:rPr lang="en-US" sz="2400" dirty="0">
+                <a:solidFill>
+                  <a:schemeClr val="accent6">
+                    <a:lumMod val="60000"/>
+                    <a:lumOff val="40000"/>
+                  </a:schemeClr>
+                </a:solidFill>
+              </a:rPr>
+              <a:t> → New model (Transformer / </a:t>
+            </a:r>
+            <a:r>
+              <a:rPr lang="en-US" sz="2400" dirty="0" err="1">
+                <a:solidFill>
+                  <a:schemeClr val="accent6">
+                    <a:lumMod val="60000"/>
+                    <a:lumOff val="40000"/>
+                  </a:schemeClr>
+                </a:solidFill>
+              </a:rPr>
+              <a:t>XGBoost</a:t>
+            </a:r>
+            <a:r>
+              <a:rPr lang="en-US" sz="2400" dirty="0">
+                <a:solidFill>
+                  <a:schemeClr val="accent6">
+                    <a:lumMod val="60000"/>
+                    <a:lumOff val="40000"/>
+                  </a:schemeClr>
+                </a:solidFill>
+              </a:rPr>
+              <a:t>)</a:t>
+            </a:r>
+          </a:p>
+          <a:p>
+            <a:endParaRPr lang="en-US" sz="2400" dirty="0">
+              <a:solidFill>
+                <a:schemeClr val="accent6">
+                  <a:lumMod val="60000"/>
+                  <a:lumOff val="40000"/>
+                </a:schemeClr>
+              </a:solidFill>
+            </a:endParaRPr>
+          </a:p>
+          <a:p>
+            <a:r>
+              <a:rPr lang="en-US" sz="2400" dirty="0">
+                <a:solidFill>
+                  <a:schemeClr val="accent6">
+                    <a:lumMod val="60000"/>
+                    <a:lumOff val="40000"/>
+                  </a:schemeClr>
+                </a:solidFill>
+              </a:rPr>
               <a:t>We have 2 group of users: A and B.</a:t>
             </a:r>
           </a:p>
@@ -7651,7 +7675,7 @@
           <p:nvPr>
             <p:extLst>
               <p:ext uri="{D42A27DB-BD31-4B8C-83A1-F6EECF244321}">
-                <p14:modId xmlns:p14="http://schemas.microsoft.com/office/powerpoint/2010/main" val="2015957595"/>
+                <p14:modId xmlns:p14="http://schemas.microsoft.com/office/powerpoint/2010/main" val="1985207684"/>
               </p:ext>
             </p:extLst>
           </p:nvPr>
@@ -7693,11 +7717,11 @@
                     <a:bodyPr/>
                     <a:lstStyle/>
                     <a:p>
-                      <a:pPr>
+                      <a:pPr algn="ctr">
                         <a:buNone/>
                       </a:pPr>
                       <a:r>
-                        <a:rPr lang="en-US" sz="2400" b="1" dirty="0">
+                        <a:rPr lang="en-US" sz="2400" b="1" u="sng" dirty="0">
                           <a:solidFill>
                             <a:schemeClr val="accent6">
                               <a:lumMod val="60000"/>
@@ -7730,11 +7754,11 @@
                     <a:bodyPr/>
                     <a:lstStyle/>
                     <a:p>
-                      <a:pPr>
+                      <a:pPr algn="ctr">
                         <a:buNone/>
                       </a:pPr>
                       <a:r>
-                        <a:rPr lang="en-US" sz="2400" b="1" dirty="0">
+                        <a:rPr lang="en-US" sz="2400" b="1" u="sng" dirty="0">
                           <a:solidFill>
                             <a:schemeClr val="accent6">
                               <a:lumMod val="60000"/>
@@ -7767,11 +7791,11 @@
                     <a:bodyPr/>
                     <a:lstStyle/>
                     <a:p>
-                      <a:pPr>
+                      <a:pPr algn="ctr">
                         <a:buNone/>
                       </a:pPr>
                       <a:r>
-                        <a:rPr lang="en-US" sz="2400" b="1" dirty="0">
+                        <a:rPr lang="en-US" sz="2400" b="1" u="sng" dirty="0">
                           <a:solidFill>
                             <a:schemeClr val="accent6">
                               <a:lumMod val="60000"/>
@@ -7811,7 +7835,7 @@
                     <a:bodyPr/>
                     <a:lstStyle/>
                     <a:p>
-                      <a:pPr>
+                      <a:pPr algn="ctr">
                         <a:buNone/>
                       </a:pPr>
                       <a:r>
@@ -7848,7 +7872,7 @@
                     <a:bodyPr/>
                     <a:lstStyle/>
                     <a:p>
-                      <a:pPr>
+                      <a:pPr algn="ctr">
                         <a:buNone/>
                       </a:pPr>
                       <a:r>
@@ -7885,7 +7909,7 @@
                     <a:bodyPr/>
                     <a:lstStyle/>
                     <a:p>
-                      <a:pPr>
+                      <a:pPr algn="ctr">
                         <a:buNone/>
                       </a:pPr>
                       <a:r>
@@ -7929,7 +7953,7 @@
                     <a:bodyPr/>
                     <a:lstStyle/>
                     <a:p>
-                      <a:pPr>
+                      <a:pPr algn="ctr">
                         <a:buNone/>
                       </a:pPr>
                       <a:r>
@@ -7966,11 +7990,11 @@
                     <a:bodyPr/>
                     <a:lstStyle/>
                     <a:p>
-                      <a:pPr>
+                      <a:pPr algn="ctr">
                         <a:buNone/>
                       </a:pPr>
                       <a:r>
-                        <a:rPr lang="en-US" sz="2400">
+                        <a:rPr lang="en-US" sz="2400" dirty="0">
                           <a:solidFill>
                             <a:schemeClr val="accent6">
                               <a:lumMod val="60000"/>
@@ -8003,7 +8027,7 @@
                     <a:bodyPr/>
                     <a:lstStyle/>
                     <a:p>
-                      <a:pPr>
+                      <a:pPr algn="ctr">
                         <a:buNone/>
                       </a:pPr>
                       <a:r>
@@ -8059,7 +8083,7 @@
         </p:nvSpPr>
         <p:spPr>
           <a:xfrm>
-            <a:off x="8430768" y="4425696"/>
+            <a:off x="9523476" y="4129741"/>
             <a:ext cx="1746504" cy="523220"/>
           </a:xfrm>
           <a:prstGeom prst="rect">
@@ -8098,7 +8122,7 @@
         </p:nvSpPr>
         <p:spPr>
           <a:xfrm>
-            <a:off x="8430768" y="5583206"/>
+            <a:off x="9464040" y="5319029"/>
             <a:ext cx="1746504" cy="523220"/>
           </a:xfrm>
           <a:prstGeom prst="rect">
@@ -8137,7 +8161,7 @@
         </p:nvSpPr>
         <p:spPr>
           <a:xfrm>
-            <a:off x="7735824" y="4526279"/>
+            <a:off x="8782812" y="4247387"/>
             <a:ext cx="521208" cy="287929"/>
           </a:xfrm>
           <a:prstGeom prst="rightArrow">
@@ -8186,7 +8210,7 @@
         </p:nvSpPr>
         <p:spPr>
           <a:xfrm>
-            <a:off x="7763256" y="5670073"/>
+            <a:off x="8782812" y="5405896"/>
             <a:ext cx="521208" cy="287929"/>
           </a:xfrm>
           <a:prstGeom prst="rightArrow">
@@ -8298,6 +8322,48 @@
                 </a:solidFill>
               </a:rPr>
               <a:t>50% email</a:t>
+            </a:r>
+          </a:p>
+        </p:txBody>
+      </p:sp>
+      <p:sp>
+        <p:nvSpPr>
+          <p:cNvPr id="4" name="TextBox 3">
+            <a:extLst>
+              <a:ext uri="{FF2B5EF4-FFF2-40B4-BE49-F238E27FC236}">
+                <a16:creationId xmlns:a16="http://schemas.microsoft.com/office/drawing/2014/main" id="{0FC0453E-5165-4FCA-34E1-77EFA883ED70}"/>
+              </a:ext>
+            </a:extLst>
+          </p:cNvPr>
+          <p:cNvSpPr txBox="1"/>
+          <p:nvPr/>
+        </p:nvSpPr>
+        <p:spPr>
+          <a:xfrm>
+            <a:off x="493776" y="6336792"/>
+            <a:ext cx="5981766" cy="461665"/>
+          </a:xfrm>
+          <a:prstGeom prst="rect">
+            <a:avLst/>
+          </a:prstGeom>
+          <a:noFill/>
+        </p:spPr>
+        <p:txBody>
+          <a:bodyPr wrap="none" rtlCol="0">
+            <a:spAutoFit/>
+          </a:bodyPr>
+          <a:lstStyle/>
+          <a:p>
+            <a:r>
+              <a:rPr lang="en-US" sz="2400" dirty="0">
+                <a:solidFill>
+                  <a:schemeClr val="accent6">
+                    <a:lumMod val="60000"/>
+                    <a:lumOff val="40000"/>
+                  </a:schemeClr>
+                </a:solidFill>
+              </a:rPr>
+              <a:t>You will check which model gives better result </a:t>
             </a:r>
           </a:p>
         </p:txBody>
@@ -8352,7 +8418,7 @@
         </p:nvSpPr>
         <p:spPr>
           <a:xfrm>
-            <a:off x="283464" y="691819"/>
+            <a:off x="91440" y="219671"/>
             <a:ext cx="9985248" cy="830997"/>
           </a:xfrm>
           <a:prstGeom prst="rect">
@@ -8378,7 +8444,7 @@
                   </a:schemeClr>
                 </a:solidFill>
               </a:rPr>
-              <a:t>Metrics to Measure: </a:t>
+              <a:t>Metrics to Measure for model: </a:t>
             </a:r>
           </a:p>
           <a:p>
@@ -8414,7 +8480,7 @@
           <p:nvPr>
             <p:extLst>
               <p:ext uri="{D42A27DB-BD31-4B8C-83A1-F6EECF244321}">
-                <p14:modId xmlns:p14="http://schemas.microsoft.com/office/powerpoint/2010/main" val="4045862941"/>
+                <p14:modId xmlns:p14="http://schemas.microsoft.com/office/powerpoint/2010/main" val="2287273362"/>
               </p:ext>
             </p:extLst>
           </p:nvPr>
@@ -8449,7 +8515,7 @@
                     <a:bodyPr/>
                     <a:lstStyle/>
                     <a:p>
-                      <a:pPr>
+                      <a:pPr algn="ctr">
                         <a:buNone/>
                       </a:pPr>
                       <a:r>
@@ -8486,7 +8552,7 @@
                     <a:bodyPr/>
                     <a:lstStyle/>
                     <a:p>
-                      <a:pPr>
+                      <a:pPr algn="ctr">
                         <a:buNone/>
                       </a:pPr>
                       <a:r>
@@ -8530,7 +8596,7 @@
                     <a:bodyPr/>
                     <a:lstStyle/>
                     <a:p>
-                      <a:pPr>
+                      <a:pPr algn="ctr">
                         <a:buNone/>
                       </a:pPr>
                       <a:r>
@@ -8567,7 +8633,7 @@
                     <a:bodyPr/>
                     <a:lstStyle/>
                     <a:p>
-                      <a:pPr>
+                      <a:pPr algn="ctr">
                         <a:buNone/>
                       </a:pPr>
                       <a:r>
@@ -8611,7 +8677,7 @@
                     <a:bodyPr/>
                     <a:lstStyle/>
                     <a:p>
-                      <a:pPr>
+                      <a:pPr algn="ctr">
                         <a:buNone/>
                       </a:pPr>
                       <a:r>
@@ -8648,11 +8714,11 @@
                     <a:bodyPr/>
                     <a:lstStyle/>
                     <a:p>
-                      <a:pPr>
+                      <a:pPr algn="ctr">
                         <a:buNone/>
                       </a:pPr>
                       <a:r>
-                        <a:rPr lang="en-US" sz="2400">
+                        <a:rPr lang="en-US" sz="2400" dirty="0">
                           <a:solidFill>
                             <a:schemeClr val="accent6">
                               <a:lumMod val="60000"/>
@@ -8692,11 +8758,11 @@
                     <a:bodyPr/>
                     <a:lstStyle/>
                     <a:p>
-                      <a:pPr>
+                      <a:pPr algn="ctr">
                         <a:buNone/>
                       </a:pPr>
                       <a:r>
-                        <a:rPr lang="en-US" sz="2400">
+                        <a:rPr lang="en-US" sz="2400" dirty="0">
                           <a:solidFill>
                             <a:schemeClr val="accent6">
                               <a:lumMod val="60000"/>
@@ -8729,7 +8795,7 @@
                     <a:bodyPr/>
                     <a:lstStyle/>
                     <a:p>
-                      <a:pPr>
+                      <a:pPr algn="ctr">
                         <a:buNone/>
                       </a:pPr>
                       <a:r>
@@ -8773,7 +8839,7 @@
                     <a:bodyPr/>
                     <a:lstStyle/>
                     <a:p>
-                      <a:pPr>
+                      <a:pPr algn="ctr">
                         <a:buNone/>
                       </a:pPr>
                       <a:r>
@@ -8810,7 +8876,7 @@
                     <a:bodyPr/>
                     <a:lstStyle/>
                     <a:p>
-                      <a:pPr>
+                      <a:pPr algn="ctr">
                         <a:buNone/>
                       </a:pPr>
                       <a:r>
@@ -8854,10 +8920,10 @@
       </p:graphicFrame>
       <p:sp>
         <p:nvSpPr>
-          <p:cNvPr id="13" name="TextBox 12">
-            <a:extLst>
-              <a:ext uri="{FF2B5EF4-FFF2-40B4-BE49-F238E27FC236}">
-                <a16:creationId xmlns:a16="http://schemas.microsoft.com/office/drawing/2014/main" id="{425FC656-F8B6-8B11-F77F-5D3CF3935F2E}"/>
+          <p:cNvPr id="2" name="TextBox 1">
+            <a:extLst>
+              <a:ext uri="{FF2B5EF4-FFF2-40B4-BE49-F238E27FC236}">
+                <a16:creationId xmlns:a16="http://schemas.microsoft.com/office/drawing/2014/main" id="{7066ED54-584D-DE94-5010-83B4434CAF0E}"/>
               </a:ext>
             </a:extLst>
           </p:cNvPr>
@@ -8866,7 +8932,7 @@
         </p:nvSpPr>
         <p:spPr>
           <a:xfrm>
-            <a:off x="8430768" y="4425696"/>
+            <a:off x="9523476" y="4129741"/>
             <a:ext cx="1746504" cy="523220"/>
           </a:xfrm>
           <a:prstGeom prst="rect">
@@ -8893,10 +8959,10 @@
       </p:sp>
       <p:sp>
         <p:nvSpPr>
-          <p:cNvPr id="14" name="TextBox 13">
-            <a:extLst>
-              <a:ext uri="{FF2B5EF4-FFF2-40B4-BE49-F238E27FC236}">
-                <a16:creationId xmlns:a16="http://schemas.microsoft.com/office/drawing/2014/main" id="{BA2F36A5-473A-6011-90D8-D37524ABC232}"/>
+          <p:cNvPr id="3" name="TextBox 2">
+            <a:extLst>
+              <a:ext uri="{FF2B5EF4-FFF2-40B4-BE49-F238E27FC236}">
+                <a16:creationId xmlns:a16="http://schemas.microsoft.com/office/drawing/2014/main" id="{C984E212-0790-99F3-FE95-74D992B16EEC}"/>
               </a:ext>
             </a:extLst>
           </p:cNvPr>
@@ -8905,7 +8971,7 @@
         </p:nvSpPr>
         <p:spPr>
           <a:xfrm>
-            <a:off x="8430768" y="5583206"/>
+            <a:off x="9464040" y="5319029"/>
             <a:ext cx="1746504" cy="523220"/>
           </a:xfrm>
           <a:prstGeom prst="rect">
@@ -8932,10 +8998,10 @@
       </p:sp>
       <p:sp>
         <p:nvSpPr>
-          <p:cNvPr id="15" name="Arrow: Right 14">
-            <a:extLst>
-              <a:ext uri="{FF2B5EF4-FFF2-40B4-BE49-F238E27FC236}">
-                <a16:creationId xmlns:a16="http://schemas.microsoft.com/office/drawing/2014/main" id="{07D646F0-6729-65A7-31E9-C3DEB54D2F25}"/>
+          <p:cNvPr id="4" name="Arrow: Right 3">
+            <a:extLst>
+              <a:ext uri="{FF2B5EF4-FFF2-40B4-BE49-F238E27FC236}">
+                <a16:creationId xmlns:a16="http://schemas.microsoft.com/office/drawing/2014/main" id="{C917A2B9-1C0A-761B-E787-0DE9B1271872}"/>
               </a:ext>
             </a:extLst>
           </p:cNvPr>
@@ -8944,7 +9010,7 @@
         </p:nvSpPr>
         <p:spPr>
           <a:xfrm>
-            <a:off x="7735824" y="4526279"/>
+            <a:off x="8782812" y="4247387"/>
             <a:ext cx="521208" cy="287929"/>
           </a:xfrm>
           <a:prstGeom prst="rightArrow">
@@ -8981,10 +9047,10 @@
       </p:sp>
       <p:sp>
         <p:nvSpPr>
-          <p:cNvPr id="16" name="Arrow: Right 15">
-            <a:extLst>
-              <a:ext uri="{FF2B5EF4-FFF2-40B4-BE49-F238E27FC236}">
-                <a16:creationId xmlns:a16="http://schemas.microsoft.com/office/drawing/2014/main" id="{DE712AAE-5D9A-DCC2-2931-F7B7C08766B8}"/>
+          <p:cNvPr id="7" name="Arrow: Right 6">
+            <a:extLst>
+              <a:ext uri="{FF2B5EF4-FFF2-40B4-BE49-F238E27FC236}">
+                <a16:creationId xmlns:a16="http://schemas.microsoft.com/office/drawing/2014/main" id="{EC95EA35-17B1-3CBE-8A2A-C6C531CA5ED9}"/>
               </a:ext>
             </a:extLst>
           </p:cNvPr>
@@ -8993,7 +9059,7 @@
         </p:nvSpPr>
         <p:spPr>
           <a:xfrm>
-            <a:off x="7763256" y="5670073"/>
+            <a:off x="8782812" y="5405896"/>
             <a:ext cx="521208" cy="287929"/>
           </a:xfrm>
           <a:prstGeom prst="rightArrow">
@@ -9033,10 +9099,10 @@
       </p:sp>
       <p:sp>
         <p:nvSpPr>
-          <p:cNvPr id="17" name="TextBox 16">
-            <a:extLst>
-              <a:ext uri="{FF2B5EF4-FFF2-40B4-BE49-F238E27FC236}">
-                <a16:creationId xmlns:a16="http://schemas.microsoft.com/office/drawing/2014/main" id="{625FF25B-1A35-C4E6-B64F-3CDC0499218F}"/>
+          <p:cNvPr id="8" name="TextBox 7">
+            <a:extLst>
+              <a:ext uri="{FF2B5EF4-FFF2-40B4-BE49-F238E27FC236}">
+                <a16:creationId xmlns:a16="http://schemas.microsoft.com/office/drawing/2014/main" id="{78D97845-B98B-0B8B-83CD-F5B6C49D35A6}"/>
               </a:ext>
             </a:extLst>
           </p:cNvPr>
@@ -9072,10 +9138,10 @@
       </p:sp>
       <p:sp>
         <p:nvSpPr>
-          <p:cNvPr id="18" name="TextBox 17">
-            <a:extLst>
-              <a:ext uri="{FF2B5EF4-FFF2-40B4-BE49-F238E27FC236}">
-                <a16:creationId xmlns:a16="http://schemas.microsoft.com/office/drawing/2014/main" id="{096237D2-14E1-FF5B-BD29-0D21AF5B6A27}"/>
+          <p:cNvPr id="9" name="TextBox 8">
+            <a:extLst>
+              <a:ext uri="{FF2B5EF4-FFF2-40B4-BE49-F238E27FC236}">
+                <a16:creationId xmlns:a16="http://schemas.microsoft.com/office/drawing/2014/main" id="{07DF16A8-6242-BEC3-1CEF-08A313DA187C}"/>
               </a:ext>
             </a:extLst>
           </p:cNvPr>
@@ -9636,7 +9702,7 @@
                         <a:buNone/>
                       </a:pPr>
                       <a:r>
-                        <a:rPr lang="en-US" sz="2400">
+                        <a:rPr lang="en-US" sz="2400" dirty="0">
                           <a:solidFill>
                             <a:schemeClr val="accent6">
                               <a:lumMod val="60000"/>
@@ -9894,10 +9960,10 @@
       </p:sp>
       <p:sp>
         <p:nvSpPr>
-          <p:cNvPr id="23" name="TextBox 22">
-            <a:extLst>
-              <a:ext uri="{FF2B5EF4-FFF2-40B4-BE49-F238E27FC236}">
-                <a16:creationId xmlns:a16="http://schemas.microsoft.com/office/drawing/2014/main" id="{E1DEE2CF-3BAE-DE2B-2ACB-35FB34111B92}"/>
+          <p:cNvPr id="2" name="TextBox 1">
+            <a:extLst>
+              <a:ext uri="{FF2B5EF4-FFF2-40B4-BE49-F238E27FC236}">
+                <a16:creationId xmlns:a16="http://schemas.microsoft.com/office/drawing/2014/main" id="{F6671D82-871A-83AF-2CA9-6C9CD7CBCCB7}"/>
               </a:ext>
             </a:extLst>
           </p:cNvPr>
@@ -9906,7 +9972,7 @@
         </p:nvSpPr>
         <p:spPr>
           <a:xfrm>
-            <a:off x="8430768" y="4425696"/>
+            <a:off x="9523476" y="4129741"/>
             <a:ext cx="1746504" cy="523220"/>
           </a:xfrm>
           <a:prstGeom prst="rect">
@@ -9933,10 +9999,10 @@
       </p:sp>
       <p:sp>
         <p:nvSpPr>
-          <p:cNvPr id="24" name="TextBox 23">
-            <a:extLst>
-              <a:ext uri="{FF2B5EF4-FFF2-40B4-BE49-F238E27FC236}">
-                <a16:creationId xmlns:a16="http://schemas.microsoft.com/office/drawing/2014/main" id="{1C335DCD-2B38-B8F7-6311-6A28D993D727}"/>
+          <p:cNvPr id="3" name="TextBox 2">
+            <a:extLst>
+              <a:ext uri="{FF2B5EF4-FFF2-40B4-BE49-F238E27FC236}">
+                <a16:creationId xmlns:a16="http://schemas.microsoft.com/office/drawing/2014/main" id="{35B946B4-6737-BF91-B507-509C9103765B}"/>
               </a:ext>
             </a:extLst>
           </p:cNvPr>
@@ -9945,7 +10011,7 @@
         </p:nvSpPr>
         <p:spPr>
           <a:xfrm>
-            <a:off x="8430768" y="5583206"/>
+            <a:off x="9464040" y="5319029"/>
             <a:ext cx="1746504" cy="523220"/>
           </a:xfrm>
           <a:prstGeom prst="rect">
@@ -9972,10 +10038,10 @@
       </p:sp>
       <p:sp>
         <p:nvSpPr>
-          <p:cNvPr id="25" name="Arrow: Right 24">
-            <a:extLst>
-              <a:ext uri="{FF2B5EF4-FFF2-40B4-BE49-F238E27FC236}">
-                <a16:creationId xmlns:a16="http://schemas.microsoft.com/office/drawing/2014/main" id="{134E8BD9-881A-11C5-7A7C-0EF1A95780AB}"/>
+          <p:cNvPr id="5" name="Arrow: Right 4">
+            <a:extLst>
+              <a:ext uri="{FF2B5EF4-FFF2-40B4-BE49-F238E27FC236}">
+                <a16:creationId xmlns:a16="http://schemas.microsoft.com/office/drawing/2014/main" id="{696BDD4D-814F-62E2-DF10-26205CC14A7F}"/>
               </a:ext>
             </a:extLst>
           </p:cNvPr>
@@ -9984,7 +10050,7 @@
         </p:nvSpPr>
         <p:spPr>
           <a:xfrm>
-            <a:off x="7735824" y="4526279"/>
+            <a:off x="8782812" y="4247387"/>
             <a:ext cx="521208" cy="287929"/>
           </a:xfrm>
           <a:prstGeom prst="rightArrow">
@@ -10021,10 +10087,10 @@
       </p:sp>
       <p:sp>
         <p:nvSpPr>
-          <p:cNvPr id="26" name="Arrow: Right 25">
-            <a:extLst>
-              <a:ext uri="{FF2B5EF4-FFF2-40B4-BE49-F238E27FC236}">
-                <a16:creationId xmlns:a16="http://schemas.microsoft.com/office/drawing/2014/main" id="{1A021B3A-96F2-BD01-6EEB-F035B8B28650}"/>
+          <p:cNvPr id="6" name="Arrow: Right 5">
+            <a:extLst>
+              <a:ext uri="{FF2B5EF4-FFF2-40B4-BE49-F238E27FC236}">
+                <a16:creationId xmlns:a16="http://schemas.microsoft.com/office/drawing/2014/main" id="{8BD5C259-7DF3-522F-F304-DA84EE368FAF}"/>
               </a:ext>
             </a:extLst>
           </p:cNvPr>
@@ -10033,7 +10099,7 @@
         </p:nvSpPr>
         <p:spPr>
           <a:xfrm>
-            <a:off x="7763256" y="5670073"/>
+            <a:off x="8782812" y="5405896"/>
             <a:ext cx="521208" cy="287929"/>
           </a:xfrm>
           <a:prstGeom prst="rightArrow">
@@ -10073,10 +10139,10 @@
       </p:sp>
       <p:sp>
         <p:nvSpPr>
-          <p:cNvPr id="27" name="TextBox 26">
-            <a:extLst>
-              <a:ext uri="{FF2B5EF4-FFF2-40B4-BE49-F238E27FC236}">
-                <a16:creationId xmlns:a16="http://schemas.microsoft.com/office/drawing/2014/main" id="{788DA9AB-AE6F-7378-FB46-BA2AA677F89E}"/>
+          <p:cNvPr id="8" name="TextBox 7">
+            <a:extLst>
+              <a:ext uri="{FF2B5EF4-FFF2-40B4-BE49-F238E27FC236}">
+                <a16:creationId xmlns:a16="http://schemas.microsoft.com/office/drawing/2014/main" id="{583A0982-7A8F-34FF-1E5F-39DAC9257805}"/>
               </a:ext>
             </a:extLst>
           </p:cNvPr>
@@ -10112,10 +10178,10 @@
       </p:sp>
       <p:sp>
         <p:nvSpPr>
-          <p:cNvPr id="28" name="TextBox 27">
-            <a:extLst>
-              <a:ext uri="{FF2B5EF4-FFF2-40B4-BE49-F238E27FC236}">
-                <a16:creationId xmlns:a16="http://schemas.microsoft.com/office/drawing/2014/main" id="{2DE1534C-A17B-CE52-5E20-8481E9229750}"/>
+          <p:cNvPr id="10" name="TextBox 9">
+            <a:extLst>
+              <a:ext uri="{FF2B5EF4-FFF2-40B4-BE49-F238E27FC236}">
+                <a16:creationId xmlns:a16="http://schemas.microsoft.com/office/drawing/2014/main" id="{6B1B00B6-96BB-F0D6-8A1D-ED8A19734EFD}"/>
               </a:ext>
             </a:extLst>
           </p:cNvPr>
@@ -10200,7 +10266,7 @@
         <p:spPr>
           <a:xfrm>
             <a:off x="150876" y="327398"/>
-            <a:ext cx="7749540" cy="4893647"/>
+            <a:ext cx="7749540" cy="5632311"/>
           </a:xfrm>
           <a:prstGeom prst="rect">
             <a:avLst/>
@@ -10322,17 +10388,7 @@
                   <a:srgbClr val="92D050"/>
                 </a:solidFill>
               </a:rPr>
-              <a:t>Example:</a:t>
-            </a:r>
-          </a:p>
-          <a:p>
-            <a:r>
-              <a:rPr lang="en-US" sz="2400" dirty="0">
-                <a:solidFill>
-                  <a:srgbClr val="92D050"/>
-                </a:solidFill>
-              </a:rPr>
-              <a:t>“Having a chatbot will increase conversions.”</a:t>
+              <a:t>Example: “Having a chatbot will increase conversions.”</a:t>
             </a:r>
           </a:p>
           <a:p>
@@ -10342,14 +10398,41 @@
               </a:solidFill>
             </a:endParaRPr>
           </a:p>
-        </p:txBody>
-      </p:sp>
-      <p:sp>
-        <p:nvSpPr>
-          <p:cNvPr id="2" name="TextBox 1">
-            <a:extLst>
-              <a:ext uri="{FF2B5EF4-FFF2-40B4-BE49-F238E27FC236}">
-                <a16:creationId xmlns:a16="http://schemas.microsoft.com/office/drawing/2014/main" id="{F31592C7-0593-8797-8D67-6F55EB72CD0F}"/>
+          <a:p>
+            <a:r>
+              <a:rPr lang="en-US" sz="2400" dirty="0">
+                <a:solidFill>
+                  <a:srgbClr val="92D050"/>
+                </a:solidFill>
+              </a:rPr>
+              <a:t>Null Hypo. :   Chatbot had no effect</a:t>
+            </a:r>
+          </a:p>
+          <a:p>
+            <a:r>
+              <a:rPr lang="en-US" sz="2400" dirty="0">
+                <a:solidFill>
+                  <a:srgbClr val="92D050"/>
+                </a:solidFill>
+              </a:rPr>
+              <a:t>Alter Hypo.:  Chatbot increased signup rate</a:t>
+            </a:r>
+          </a:p>
+          <a:p>
+            <a:endParaRPr lang="en-US" sz="2400" dirty="0">
+              <a:solidFill>
+                <a:srgbClr val="92D050"/>
+              </a:solidFill>
+            </a:endParaRPr>
+          </a:p>
+        </p:txBody>
+      </p:sp>
+      <p:sp>
+        <p:nvSpPr>
+          <p:cNvPr id="13" name="TextBox 12">
+            <a:extLst>
+              <a:ext uri="{FF2B5EF4-FFF2-40B4-BE49-F238E27FC236}">
+                <a16:creationId xmlns:a16="http://schemas.microsoft.com/office/drawing/2014/main" id="{52A42BAD-36C6-A60E-5486-E5FF6C619581}"/>
               </a:ext>
             </a:extLst>
           </p:cNvPr>
@@ -10358,7 +10441,7 @@
         </p:nvSpPr>
         <p:spPr>
           <a:xfrm>
-            <a:off x="5925312" y="3017520"/>
+            <a:off x="5922264" y="2961538"/>
             <a:ext cx="558166" cy="830997"/>
           </a:xfrm>
           <a:prstGeom prst="rect">
@@ -10385,10 +10468,10 @@
       </p:sp>
       <p:sp>
         <p:nvSpPr>
-          <p:cNvPr id="4" name="TextBox 3">
-            <a:extLst>
-              <a:ext uri="{FF2B5EF4-FFF2-40B4-BE49-F238E27FC236}">
-                <a16:creationId xmlns:a16="http://schemas.microsoft.com/office/drawing/2014/main" id="{AF88C8AF-67B3-6222-FD3E-24A423A1A6C5}"/>
+          <p:cNvPr id="14" name="TextBox 13">
+            <a:extLst>
+              <a:ext uri="{FF2B5EF4-FFF2-40B4-BE49-F238E27FC236}">
+                <a16:creationId xmlns:a16="http://schemas.microsoft.com/office/drawing/2014/main" id="{A4DD09A6-B739-A908-855E-AF7BD040F46A}"/>
               </a:ext>
             </a:extLst>
           </p:cNvPr>
@@ -10397,7 +10480,7 @@
         </p:nvSpPr>
         <p:spPr>
           <a:xfrm>
-            <a:off x="5967984" y="5376672"/>
+            <a:off x="5922264" y="5409063"/>
             <a:ext cx="529312" cy="830997"/>
           </a:xfrm>
           <a:prstGeom prst="rect">
@@ -10414,7 +10497,7 @@
             <a:r>
               <a:rPr lang="en-US" sz="4800" b="1" dirty="0">
                 <a:solidFill>
-                  <a:srgbClr val="92D050"/>
+                  <a:srgbClr val="00B0F0"/>
                 </a:solidFill>
               </a:rPr>
               <a:t>B</a:t>
@@ -10424,10 +10507,10 @@
       </p:sp>
       <p:pic>
         <p:nvPicPr>
-          <p:cNvPr id="5" name="Picture 4">
-            <a:extLst>
-              <a:ext uri="{FF2B5EF4-FFF2-40B4-BE49-F238E27FC236}">
-                <a16:creationId xmlns:a16="http://schemas.microsoft.com/office/drawing/2014/main" id="{3E3C8E30-0667-1A1B-2411-27D1877765C5}"/>
+          <p:cNvPr id="15" name="Picture 14">
+            <a:extLst>
+              <a:ext uri="{FF2B5EF4-FFF2-40B4-BE49-F238E27FC236}">
+                <a16:creationId xmlns:a16="http://schemas.microsoft.com/office/drawing/2014/main" id="{A3191067-391D-4B19-3413-3E21A5F6DFFD}"/>
               </a:ext>
             </a:extLst>
           </p:cNvPr>
@@ -10444,8 +10527,8 @@
         </p:blipFill>
         <p:spPr>
           <a:xfrm>
-            <a:off x="6571143" y="3081528"/>
-            <a:ext cx="5370921" cy="1538946"/>
+            <a:off x="6922008" y="2961538"/>
+            <a:ext cx="5081929" cy="1456140"/>
           </a:xfrm>
           <a:prstGeom prst="rect">
             <a:avLst/>
@@ -10454,10 +10537,10 @@
       </p:pic>
       <p:pic>
         <p:nvPicPr>
-          <p:cNvPr id="6" name="Picture 5">
-            <a:extLst>
-              <a:ext uri="{FF2B5EF4-FFF2-40B4-BE49-F238E27FC236}">
-                <a16:creationId xmlns:a16="http://schemas.microsoft.com/office/drawing/2014/main" id="{09826305-296B-526A-B066-6FE609A2AFD1}"/>
+          <p:cNvPr id="16" name="Picture 15">
+            <a:extLst>
+              <a:ext uri="{FF2B5EF4-FFF2-40B4-BE49-F238E27FC236}">
+                <a16:creationId xmlns:a16="http://schemas.microsoft.com/office/drawing/2014/main" id="{0CA8A5BC-E15F-1CD3-941E-8F1ADCB6E683}"/>
               </a:ext>
             </a:extLst>
           </p:cNvPr>
@@ -10474,8 +10557,8 @@
         </p:blipFill>
         <p:spPr>
           <a:xfrm>
-            <a:off x="6571143" y="5192733"/>
-            <a:ext cx="5386541" cy="1543422"/>
+            <a:off x="6942428" y="5064271"/>
+            <a:ext cx="5081932" cy="1456141"/>
           </a:xfrm>
           <a:prstGeom prst="rect">
             <a:avLst/>
@@ -10484,10 +10567,10 @@
       </p:pic>
       <p:sp>
         <p:nvSpPr>
-          <p:cNvPr id="7" name="TextBox 6">
-            <a:extLst>
-              <a:ext uri="{FF2B5EF4-FFF2-40B4-BE49-F238E27FC236}">
-                <a16:creationId xmlns:a16="http://schemas.microsoft.com/office/drawing/2014/main" id="{CF25F1C3-D12B-FDFF-B5EB-BA3226C9F8B0}"/>
+          <p:cNvPr id="17" name="TextBox 16">
+            <a:extLst>
+              <a:ext uri="{FF2B5EF4-FFF2-40B4-BE49-F238E27FC236}">
+                <a16:creationId xmlns:a16="http://schemas.microsoft.com/office/drawing/2014/main" id="{AF7D05C1-D4BA-2049-CB08-2D9E8D0203F1}"/>
               </a:ext>
             </a:extLst>
           </p:cNvPr>
@@ -10496,8 +10579,8 @@
         </p:nvSpPr>
         <p:spPr>
           <a:xfrm>
-            <a:off x="7040880" y="5980176"/>
-            <a:ext cx="1882503" cy="523220"/>
+            <a:off x="6942428" y="5774775"/>
+            <a:ext cx="2366161" cy="646331"/>
           </a:xfrm>
           <a:prstGeom prst="rect">
             <a:avLst/>
@@ -10511,9 +10594,9 @@
           <a:lstStyle/>
           <a:p>
             <a:r>
-              <a:rPr lang="en-US" sz="1400" b="1" dirty="0">
-                <a:solidFill>
-                  <a:srgbClr val="00B050"/>
+              <a:rPr lang="en-US" b="1" dirty="0">
+                <a:solidFill>
+                  <a:srgbClr val="00B0F0"/>
                 </a:solidFill>
               </a:rPr>
               <a:t>Chatbot:</a:t>
@@ -10521,9 +10604,9 @@
           </a:p>
           <a:p>
             <a:r>
-              <a:rPr lang="en-US" sz="1400" b="1" dirty="0">
-                <a:solidFill>
-                  <a:srgbClr val="00B050"/>
+              <a:rPr lang="en-US" b="1" dirty="0">
+                <a:solidFill>
+                  <a:srgbClr val="00B0F0"/>
                 </a:solidFill>
               </a:rPr>
               <a:t>Hello. How can I help ?</a:t>
@@ -10582,7 +10665,7 @@
         <p:spPr>
           <a:xfrm>
             <a:off x="361188" y="802886"/>
-            <a:ext cx="6190488" cy="3785652"/>
+            <a:ext cx="6190488" cy="4154984"/>
           </a:xfrm>
           <a:prstGeom prst="rect">
             <a:avLst/>
@@ -10605,23 +10688,62 @@
             </a:r>
           </a:p>
           <a:p>
+            <a:endParaRPr lang="en-US" sz="2400" b="1" dirty="0">
+              <a:solidFill>
+                <a:srgbClr val="92D050"/>
+              </a:solidFill>
+            </a:endParaRPr>
+          </a:p>
+          <a:p>
             <a:r>
               <a:rPr lang="en-US" sz="2400" dirty="0">
                 <a:solidFill>
                   <a:srgbClr val="92D050"/>
                 </a:solidFill>
               </a:rPr>
-              <a:t>Group A → sees old version, without chatbot</a:t>
-            </a:r>
-          </a:p>
-          <a:p>
+              <a:t>Group A → sees </a:t>
+            </a:r>
+            <a:r>
+              <a:rPr lang="en-US" sz="2400" b="1" dirty="0">
+                <a:solidFill>
+                  <a:srgbClr val="92D050"/>
+                </a:solidFill>
+              </a:rPr>
+              <a:t>old</a:t>
+            </a:r>
             <a:r>
               <a:rPr lang="en-US" sz="2400" dirty="0">
                 <a:solidFill>
                   <a:srgbClr val="92D050"/>
                 </a:solidFill>
               </a:rPr>
-              <a:t>Group B → sees new version, with chatbot</a:t>
+              <a:t> version, without chatbot</a:t>
+            </a:r>
+          </a:p>
+          <a:p>
+            <a:r>
+              <a:rPr lang="en-US" sz="2400" dirty="0">
+                <a:solidFill>
+                  <a:srgbClr val="92D050"/>
+                </a:solidFill>
+              </a:rPr>
+              <a:t>Group B → sees </a:t>
+            </a:r>
+            <a:r>
+              <a:rPr lang="en-US" sz="2400" b="1" dirty="0">
+                <a:solidFill>
+                  <a:srgbClr val="92D050"/>
+                </a:solidFill>
+              </a:rPr>
+              <a:t>new</a:t>
+            </a:r>
+            <a:r>
+              <a:rPr lang="en-US" sz="2400" dirty="0">
+                <a:solidFill>
+                  <a:srgbClr val="92D050"/>
+                </a:solidFill>
+              </a:rPr>
+              <a:t> version, with chatbot</a:t>
             </a:r>
           </a:p>
           <a:p>
@@ -10666,30 +10788,30 @@
             </a:r>
           </a:p>
           <a:p>
-            <a:r>
-              <a:rPr lang="en-US" sz="2400" dirty="0">
-                <a:solidFill>
-                  <a:srgbClr val="92D050"/>
-                </a:solidFill>
-              </a:rPr>
-              <a:t>Collect data for sufficient time.</a:t>
-            </a:r>
-          </a:p>
-          <a:p>
-            <a:endParaRPr lang="en-US" sz="2400" dirty="0">
+            <a:endParaRPr lang="en-US" sz="2400" b="1" dirty="0">
               <a:solidFill>
                 <a:srgbClr val="92D050"/>
               </a:solidFill>
             </a:endParaRPr>
           </a:p>
-        </p:txBody>
-      </p:sp>
-      <p:sp>
-        <p:nvSpPr>
-          <p:cNvPr id="2" name="TextBox 1">
-            <a:extLst>
-              <a:ext uri="{FF2B5EF4-FFF2-40B4-BE49-F238E27FC236}">
-                <a16:creationId xmlns:a16="http://schemas.microsoft.com/office/drawing/2014/main" id="{0850C99F-8DDE-839C-1224-AE8EDBBA9851}"/>
+          <a:p>
+            <a:r>
+              <a:rPr lang="en-US" sz="2400" dirty="0">
+                <a:solidFill>
+                  <a:srgbClr val="92D050"/>
+                </a:solidFill>
+              </a:rPr>
+              <a:t>Collect data for sufficient time.</a:t>
+            </a:r>
+          </a:p>
+        </p:txBody>
+      </p:sp>
+      <p:sp>
+        <p:nvSpPr>
+          <p:cNvPr id="8" name="TextBox 7">
+            <a:extLst>
+              <a:ext uri="{FF2B5EF4-FFF2-40B4-BE49-F238E27FC236}">
+                <a16:creationId xmlns:a16="http://schemas.microsoft.com/office/drawing/2014/main" id="{533B10CE-ECE1-D0A6-3FF1-FC9ACA464155}"/>
               </a:ext>
             </a:extLst>
           </p:cNvPr>
@@ -10698,7 +10820,7 @@
         </p:nvSpPr>
         <p:spPr>
           <a:xfrm>
-            <a:off x="5925312" y="3017520"/>
+            <a:off x="5922264" y="2961538"/>
             <a:ext cx="558166" cy="830997"/>
           </a:xfrm>
           <a:prstGeom prst="rect">
@@ -10725,10 +10847,10 @@
       </p:sp>
       <p:sp>
         <p:nvSpPr>
-          <p:cNvPr id="4" name="TextBox 3">
-            <a:extLst>
-              <a:ext uri="{FF2B5EF4-FFF2-40B4-BE49-F238E27FC236}">
-                <a16:creationId xmlns:a16="http://schemas.microsoft.com/office/drawing/2014/main" id="{059CE7AB-8758-0BD3-1947-3FC068FF5555}"/>
+          <p:cNvPr id="9" name="TextBox 8">
+            <a:extLst>
+              <a:ext uri="{FF2B5EF4-FFF2-40B4-BE49-F238E27FC236}">
+                <a16:creationId xmlns:a16="http://schemas.microsoft.com/office/drawing/2014/main" id="{23903AF9-D33C-6C2C-4E30-F7922F8CDCCA}"/>
               </a:ext>
             </a:extLst>
           </p:cNvPr>
@@ -10737,7 +10859,7 @@
         </p:nvSpPr>
         <p:spPr>
           <a:xfrm>
-            <a:off x="5967984" y="5376672"/>
+            <a:off x="5922264" y="5409063"/>
             <a:ext cx="529312" cy="830997"/>
           </a:xfrm>
           <a:prstGeom prst="rect">
@@ -10754,7 +10876,7 @@
             <a:r>
               <a:rPr lang="en-US" sz="4800" b="1" dirty="0">
                 <a:solidFill>
-                  <a:srgbClr val="92D050"/>
+                  <a:srgbClr val="00B0F0"/>
                 </a:solidFill>
               </a:rPr>
               <a:t>B</a:t>
@@ -10764,10 +10886,10 @@
       </p:sp>
       <p:pic>
         <p:nvPicPr>
-          <p:cNvPr id="5" name="Picture 4">
-            <a:extLst>
-              <a:ext uri="{FF2B5EF4-FFF2-40B4-BE49-F238E27FC236}">
-                <a16:creationId xmlns:a16="http://schemas.microsoft.com/office/drawing/2014/main" id="{14E1AF17-95BF-888B-F316-2AE4F7442565}"/>
+          <p:cNvPr id="10" name="Picture 9">
+            <a:extLst>
+              <a:ext uri="{FF2B5EF4-FFF2-40B4-BE49-F238E27FC236}">
+                <a16:creationId xmlns:a16="http://schemas.microsoft.com/office/drawing/2014/main" id="{6D241380-030E-5EAD-870B-051A436FE423}"/>
               </a:ext>
             </a:extLst>
           </p:cNvPr>
@@ -10784,8 +10906,8 @@
         </p:blipFill>
         <p:spPr>
           <a:xfrm>
-            <a:off x="6571143" y="3081528"/>
-            <a:ext cx="5370921" cy="1538946"/>
+            <a:off x="6922008" y="2961538"/>
+            <a:ext cx="5081929" cy="1456140"/>
           </a:xfrm>
           <a:prstGeom prst="rect">
             <a:avLst/>
@@ -10794,10 +10916,10 @@
       </p:pic>
       <p:pic>
         <p:nvPicPr>
-          <p:cNvPr id="6" name="Picture 5">
-            <a:extLst>
-              <a:ext uri="{FF2B5EF4-FFF2-40B4-BE49-F238E27FC236}">
-                <a16:creationId xmlns:a16="http://schemas.microsoft.com/office/drawing/2014/main" id="{7CC777CE-A457-7FFD-F839-5422985B45E6}"/>
+          <p:cNvPr id="11" name="Picture 10">
+            <a:extLst>
+              <a:ext uri="{FF2B5EF4-FFF2-40B4-BE49-F238E27FC236}">
+                <a16:creationId xmlns:a16="http://schemas.microsoft.com/office/drawing/2014/main" id="{F2099AD9-B3CC-B45A-1855-B0718AE07F64}"/>
               </a:ext>
             </a:extLst>
           </p:cNvPr>
@@ -10814,8 +10936,8 @@
         </p:blipFill>
         <p:spPr>
           <a:xfrm>
-            <a:off x="6571143" y="5192733"/>
-            <a:ext cx="5386541" cy="1543422"/>
+            <a:off x="6942428" y="5064271"/>
+            <a:ext cx="5081932" cy="1456141"/>
           </a:xfrm>
           <a:prstGeom prst="rect">
             <a:avLst/>
@@ -10824,10 +10946,10 @@
       </p:pic>
       <p:sp>
         <p:nvSpPr>
-          <p:cNvPr id="7" name="TextBox 6">
-            <a:extLst>
-              <a:ext uri="{FF2B5EF4-FFF2-40B4-BE49-F238E27FC236}">
-                <a16:creationId xmlns:a16="http://schemas.microsoft.com/office/drawing/2014/main" id="{287EEAE4-63AE-E28E-5CEE-468ABDA4A81E}"/>
+          <p:cNvPr id="12" name="TextBox 11">
+            <a:extLst>
+              <a:ext uri="{FF2B5EF4-FFF2-40B4-BE49-F238E27FC236}">
+                <a16:creationId xmlns:a16="http://schemas.microsoft.com/office/drawing/2014/main" id="{625D7231-7A92-3726-370B-88C3EF23564F}"/>
               </a:ext>
             </a:extLst>
           </p:cNvPr>
@@ -10836,8 +10958,8 @@
         </p:nvSpPr>
         <p:spPr>
           <a:xfrm>
-            <a:off x="7040880" y="5980176"/>
-            <a:ext cx="1882503" cy="523220"/>
+            <a:off x="6942428" y="5774775"/>
+            <a:ext cx="2366161" cy="646331"/>
           </a:xfrm>
           <a:prstGeom prst="rect">
             <a:avLst/>
@@ -10851,9 +10973,9 @@
           <a:lstStyle/>
           <a:p>
             <a:r>
-              <a:rPr lang="en-US" sz="1400" b="1" dirty="0">
-                <a:solidFill>
-                  <a:srgbClr val="00B050"/>
+              <a:rPr lang="en-US" b="1" dirty="0">
+                <a:solidFill>
+                  <a:srgbClr val="00B0F0"/>
                 </a:solidFill>
               </a:rPr>
               <a:t>Chatbot:</a:t>
@@ -10861,9 +10983,9 @@
           </a:p>
           <a:p>
             <a:r>
-              <a:rPr lang="en-US" sz="1400" b="1" dirty="0">
-                <a:solidFill>
-                  <a:srgbClr val="00B050"/>
+              <a:rPr lang="en-US" b="1" dirty="0">
+                <a:solidFill>
+                  <a:srgbClr val="00B0F0"/>
                 </a:solidFill>
               </a:rPr>
               <a:t>Hello. How can I help ?</a:t>
@@ -11000,10 +11122,10 @@
       </p:sp>
       <p:sp>
         <p:nvSpPr>
-          <p:cNvPr id="2" name="TextBox 1">
-            <a:extLst>
-              <a:ext uri="{FF2B5EF4-FFF2-40B4-BE49-F238E27FC236}">
-                <a16:creationId xmlns:a16="http://schemas.microsoft.com/office/drawing/2014/main" id="{6E69900A-08B2-B5FF-CB20-F6F601C249E3}"/>
+          <p:cNvPr id="8" name="TextBox 7">
+            <a:extLst>
+              <a:ext uri="{FF2B5EF4-FFF2-40B4-BE49-F238E27FC236}">
+                <a16:creationId xmlns:a16="http://schemas.microsoft.com/office/drawing/2014/main" id="{4A00DEBF-56F1-A430-F7FC-86C9397CAA86}"/>
               </a:ext>
             </a:extLst>
           </p:cNvPr>
@@ -11012,7 +11134,7 @@
         </p:nvSpPr>
         <p:spPr>
           <a:xfrm>
-            <a:off x="5925312" y="3017520"/>
+            <a:off x="5922264" y="2961538"/>
             <a:ext cx="558166" cy="830997"/>
           </a:xfrm>
           <a:prstGeom prst="rect">
@@ -11039,10 +11161,10 @@
       </p:sp>
       <p:sp>
         <p:nvSpPr>
-          <p:cNvPr id="4" name="TextBox 3">
-            <a:extLst>
-              <a:ext uri="{FF2B5EF4-FFF2-40B4-BE49-F238E27FC236}">
-                <a16:creationId xmlns:a16="http://schemas.microsoft.com/office/drawing/2014/main" id="{A6E0837B-26B5-4A7B-77C4-2F6068397F0B}"/>
+          <p:cNvPr id="9" name="TextBox 8">
+            <a:extLst>
+              <a:ext uri="{FF2B5EF4-FFF2-40B4-BE49-F238E27FC236}">
+                <a16:creationId xmlns:a16="http://schemas.microsoft.com/office/drawing/2014/main" id="{5E94EB3E-FFDB-3F59-4755-CFC9F6A58443}"/>
               </a:ext>
             </a:extLst>
           </p:cNvPr>
@@ -11051,7 +11173,7 @@
         </p:nvSpPr>
         <p:spPr>
           <a:xfrm>
-            <a:off x="5967984" y="5376672"/>
+            <a:off x="5922264" y="5409063"/>
             <a:ext cx="529312" cy="830997"/>
           </a:xfrm>
           <a:prstGeom prst="rect">
@@ -11068,7 +11190,7 @@
             <a:r>
               <a:rPr lang="en-US" sz="4800" b="1" dirty="0">
                 <a:solidFill>
-                  <a:srgbClr val="92D050"/>
+                  <a:srgbClr val="00B0F0"/>
                 </a:solidFill>
               </a:rPr>
               <a:t>B</a:t>
@@ -11078,10 +11200,10 @@
       </p:sp>
       <p:pic>
         <p:nvPicPr>
-          <p:cNvPr id="5" name="Picture 4">
-            <a:extLst>
-              <a:ext uri="{FF2B5EF4-FFF2-40B4-BE49-F238E27FC236}">
-                <a16:creationId xmlns:a16="http://schemas.microsoft.com/office/drawing/2014/main" id="{0ADB9A54-98B0-732E-EFCA-05A5B965AE6F}"/>
+          <p:cNvPr id="10" name="Picture 9">
+            <a:extLst>
+              <a:ext uri="{FF2B5EF4-FFF2-40B4-BE49-F238E27FC236}">
+                <a16:creationId xmlns:a16="http://schemas.microsoft.com/office/drawing/2014/main" id="{70657608-B0A3-F0CB-C221-1F79B029AAB9}"/>
               </a:ext>
             </a:extLst>
           </p:cNvPr>
@@ -11098,8 +11220,8 @@
         </p:blipFill>
         <p:spPr>
           <a:xfrm>
-            <a:off x="6571143" y="3081528"/>
-            <a:ext cx="5370921" cy="1538946"/>
+            <a:off x="6922008" y="2961538"/>
+            <a:ext cx="5081929" cy="1456140"/>
           </a:xfrm>
           <a:prstGeom prst="rect">
             <a:avLst/>
@@ -11108,10 +11230,10 @@
       </p:pic>
       <p:pic>
         <p:nvPicPr>
-          <p:cNvPr id="6" name="Picture 5">
-            <a:extLst>
-              <a:ext uri="{FF2B5EF4-FFF2-40B4-BE49-F238E27FC236}">
-                <a16:creationId xmlns:a16="http://schemas.microsoft.com/office/drawing/2014/main" id="{0CED250B-73D8-58DB-C203-B6D7F4EF4A81}"/>
+          <p:cNvPr id="11" name="Picture 10">
+            <a:extLst>
+              <a:ext uri="{FF2B5EF4-FFF2-40B4-BE49-F238E27FC236}">
+                <a16:creationId xmlns:a16="http://schemas.microsoft.com/office/drawing/2014/main" id="{5B4534A3-9CF1-1FE5-52A9-2D9E3FF22DE6}"/>
               </a:ext>
             </a:extLst>
           </p:cNvPr>
@@ -11128,8 +11250,8 @@
         </p:blipFill>
         <p:spPr>
           <a:xfrm>
-            <a:off x="6571143" y="5192733"/>
-            <a:ext cx="5386541" cy="1543422"/>
+            <a:off x="6942428" y="5064271"/>
+            <a:ext cx="5081932" cy="1456141"/>
           </a:xfrm>
           <a:prstGeom prst="rect">
             <a:avLst/>
@@ -11138,10 +11260,10 @@
       </p:pic>
       <p:sp>
         <p:nvSpPr>
-          <p:cNvPr id="7" name="TextBox 6">
-            <a:extLst>
-              <a:ext uri="{FF2B5EF4-FFF2-40B4-BE49-F238E27FC236}">
-                <a16:creationId xmlns:a16="http://schemas.microsoft.com/office/drawing/2014/main" id="{749657E7-6872-2BA4-1251-E5819FE80C76}"/>
+          <p:cNvPr id="12" name="TextBox 11">
+            <a:extLst>
+              <a:ext uri="{FF2B5EF4-FFF2-40B4-BE49-F238E27FC236}">
+                <a16:creationId xmlns:a16="http://schemas.microsoft.com/office/drawing/2014/main" id="{7558D809-52AF-4FBA-F3A8-3563BAC914B6}"/>
               </a:ext>
             </a:extLst>
           </p:cNvPr>
@@ -11150,8 +11272,8 @@
         </p:nvSpPr>
         <p:spPr>
           <a:xfrm>
-            <a:off x="7040880" y="5980176"/>
-            <a:ext cx="1882503" cy="523220"/>
+            <a:off x="6942428" y="5774775"/>
+            <a:ext cx="2366161" cy="646331"/>
           </a:xfrm>
           <a:prstGeom prst="rect">
             <a:avLst/>
@@ -11165,9 +11287,9 @@
           <a:lstStyle/>
           <a:p>
             <a:r>
-              <a:rPr lang="en-US" sz="1400" b="1" dirty="0">
-                <a:solidFill>
-                  <a:srgbClr val="00B050"/>
+              <a:rPr lang="en-US" b="1" dirty="0">
+                <a:solidFill>
+                  <a:srgbClr val="00B0F0"/>
                 </a:solidFill>
               </a:rPr>
               <a:t>Chatbot:</a:t>
@@ -11175,9 +11297,9 @@
           </a:p>
           <a:p>
             <a:r>
-              <a:rPr lang="en-US" sz="1400" b="1" dirty="0">
-                <a:solidFill>
-                  <a:srgbClr val="00B050"/>
+              <a:rPr lang="en-US" b="1" dirty="0">
+                <a:solidFill>
+                  <a:srgbClr val="00B0F0"/>
                 </a:solidFill>
               </a:rPr>
               <a:t>Hello. How can I help ?</a:t>

--- a/probability_and_statistics/5_inference/Stats-A-B-testing/Stats-A-B-testing.pptx
+++ b/probability_and_statistics/5_inference/Stats-A-B-testing/Stats-A-B-testing.pptx
@@ -228,7 +228,7 @@
           <a:p>
             <a:fld id="{7BAEECA8-D063-486F-AE31-5020270C1449}" type="datetimeFigureOut">
               <a:rPr lang="en-US" smtClean="0"/>
-              <a:t>4/15/2026</a:t>
+              <a:t>5/4/2026</a:t>
             </a:fld>
             <a:endParaRPr lang="en-US"/>
           </a:p>
@@ -470,7 +470,7 @@
           <a:p>
             <a:fld id="{6383FAE1-13DE-4511-8C1B-C8AFB720664C}" type="datetimeFigureOut">
               <a:rPr lang="en-US" smtClean="0"/>
-              <a:t>4/15/2026</a:t>
+              <a:t>5/4/2026</a:t>
             </a:fld>
             <a:endParaRPr lang="en-US"/>
           </a:p>
@@ -668,7 +668,7 @@
           <a:p>
             <a:fld id="{6383FAE1-13DE-4511-8C1B-C8AFB720664C}" type="datetimeFigureOut">
               <a:rPr lang="en-US" smtClean="0"/>
-              <a:t>4/15/2026</a:t>
+              <a:t>5/4/2026</a:t>
             </a:fld>
             <a:endParaRPr lang="en-US"/>
           </a:p>
@@ -876,7 +876,7 @@
           <a:p>
             <a:fld id="{6383FAE1-13DE-4511-8C1B-C8AFB720664C}" type="datetimeFigureOut">
               <a:rPr lang="en-US" smtClean="0"/>
-              <a:t>4/15/2026</a:t>
+              <a:t>5/4/2026</a:t>
             </a:fld>
             <a:endParaRPr lang="en-US"/>
           </a:p>
@@ -1074,7 +1074,7 @@
           <a:p>
             <a:fld id="{6383FAE1-13DE-4511-8C1B-C8AFB720664C}" type="datetimeFigureOut">
               <a:rPr lang="en-US" smtClean="0"/>
-              <a:t>4/15/2026</a:t>
+              <a:t>5/4/2026</a:t>
             </a:fld>
             <a:endParaRPr lang="en-US"/>
           </a:p>
@@ -1349,7 +1349,7 @@
           <a:p>
             <a:fld id="{6383FAE1-13DE-4511-8C1B-C8AFB720664C}" type="datetimeFigureOut">
               <a:rPr lang="en-US" smtClean="0"/>
-              <a:t>4/15/2026</a:t>
+              <a:t>5/4/2026</a:t>
             </a:fld>
             <a:endParaRPr lang="en-US"/>
           </a:p>
@@ -1614,7 +1614,7 @@
           <a:p>
             <a:fld id="{6383FAE1-13DE-4511-8C1B-C8AFB720664C}" type="datetimeFigureOut">
               <a:rPr lang="en-US" smtClean="0"/>
-              <a:t>4/15/2026</a:t>
+              <a:t>5/4/2026</a:t>
             </a:fld>
             <a:endParaRPr lang="en-US"/>
           </a:p>
@@ -2026,7 +2026,7 @@
           <a:p>
             <a:fld id="{6383FAE1-13DE-4511-8C1B-C8AFB720664C}" type="datetimeFigureOut">
               <a:rPr lang="en-US" smtClean="0"/>
-              <a:t>4/15/2026</a:t>
+              <a:t>5/4/2026</a:t>
             </a:fld>
             <a:endParaRPr lang="en-US"/>
           </a:p>
@@ -2167,7 +2167,7 @@
           <a:p>
             <a:fld id="{6383FAE1-13DE-4511-8C1B-C8AFB720664C}" type="datetimeFigureOut">
               <a:rPr lang="en-US" smtClean="0"/>
-              <a:t>4/15/2026</a:t>
+              <a:t>5/4/2026</a:t>
             </a:fld>
             <a:endParaRPr lang="en-US"/>
           </a:p>
@@ -2280,7 +2280,7 @@
           <a:p>
             <a:fld id="{6383FAE1-13DE-4511-8C1B-C8AFB720664C}" type="datetimeFigureOut">
               <a:rPr lang="en-US" smtClean="0"/>
-              <a:t>4/15/2026</a:t>
+              <a:t>5/4/2026</a:t>
             </a:fld>
             <a:endParaRPr lang="en-US"/>
           </a:p>
@@ -2591,7 +2591,7 @@
           <a:p>
             <a:fld id="{6383FAE1-13DE-4511-8C1B-C8AFB720664C}" type="datetimeFigureOut">
               <a:rPr lang="en-US" smtClean="0"/>
-              <a:t>4/15/2026</a:t>
+              <a:t>5/4/2026</a:t>
             </a:fld>
             <a:endParaRPr lang="en-US"/>
           </a:p>
@@ -2882,7 +2882,7 @@
           <a:p>
             <a:fld id="{6383FAE1-13DE-4511-8C1B-C8AFB720664C}" type="datetimeFigureOut">
               <a:rPr lang="en-US" smtClean="0"/>
-              <a:t>4/15/2026</a:t>
+              <a:t>5/4/2026</a:t>
             </a:fld>
             <a:endParaRPr lang="en-US"/>
           </a:p>
@@ -3126,7 +3126,7 @@
           <a:p>
             <a:fld id="{6383FAE1-13DE-4511-8C1B-C8AFB720664C}" type="datetimeFigureOut">
               <a:rPr lang="en-US" smtClean="0"/>
-              <a:t>4/15/2026</a:t>
+              <a:t>5/4/2026</a:t>
             </a:fld>
             <a:endParaRPr lang="en-US"/>
           </a:p>
@@ -7162,7 +7162,7 @@
         </p:blipFill>
         <p:spPr>
           <a:xfrm>
-            <a:off x="5414922" y="2529708"/>
+            <a:off x="5435344" y="2775278"/>
             <a:ext cx="6589015" cy="1887970"/>
           </a:xfrm>
           <a:prstGeom prst="rect">
